--- a/67.pptx
+++ b/67.pptx
@@ -141,7 +141,7 @@
       </p:grpSpPr>
       <p:sp>
         <p:nvSpPr>
-          <p:cNvPr id="1978283685" name="Header Placeholder 1"/>
+          <p:cNvPr id="1641239491" name="Header Placeholder 1"/>
           <p:cNvSpPr>
             <a:spLocks noGrp="1"/>
           </p:cNvSpPr>
@@ -175,7 +175,7 @@
       </p:sp>
       <p:sp>
         <p:nvSpPr>
-          <p:cNvPr id="1221072083" name="Date Placeholder 2"/>
+          <p:cNvPr id="954565675" name="Date Placeholder 2"/>
           <p:cNvSpPr>
             <a:spLocks noGrp="1"/>
           </p:cNvSpPr>
@@ -213,7 +213,7 @@
       </p:sp>
       <p:sp>
         <p:nvSpPr>
-          <p:cNvPr id="1979719328" name="Slide Image Placeholder 3"/>
+          <p:cNvPr id="1196154312" name="Slide Image Placeholder 3"/>
           <p:cNvSpPr>
             <a:spLocks noChangeAspect="1" noGrp="1" noRot="1"/>
           </p:cNvSpPr>
@@ -249,7 +249,7 @@
       </p:sp>
       <p:sp>
         <p:nvSpPr>
-          <p:cNvPr id="2027417540" name="Notes Placeholder 4"/>
+          <p:cNvPr id="1973001305" name="Notes Placeholder 4"/>
           <p:cNvSpPr>
             <a:spLocks noGrp="1"/>
           </p:cNvSpPr>
@@ -323,7 +323,7 @@
       </p:sp>
       <p:sp>
         <p:nvSpPr>
-          <p:cNvPr id="867987386" name="Footer Placeholder 5"/>
+          <p:cNvPr id="1568470620" name="Footer Placeholder 5"/>
           <p:cNvSpPr>
             <a:spLocks noGrp="1"/>
           </p:cNvSpPr>
@@ -357,7 +357,7 @@
       </p:sp>
       <p:sp>
         <p:nvSpPr>
-          <p:cNvPr id="193920358" name="Slide Number Placeholder 6"/>
+          <p:cNvPr id="922381865" name="Slide Number Placeholder 6"/>
           <p:cNvSpPr>
             <a:spLocks noGrp="1"/>
           </p:cNvSpPr>
@@ -510,7 +510,7 @@
       </p:grpSpPr>
       <p:sp>
         <p:nvSpPr>
-          <p:cNvPr id="1023438768" name="Slide Image Placeholder 1"/>
+          <p:cNvPr id="699977956" name="Slide Image Placeholder 1"/>
           <p:cNvSpPr>
             <a:spLocks noChangeAspect="1" noGrp="1" noRot="1"/>
           </p:cNvSpPr>
@@ -527,7 +527,7 @@
       </p:sp>
       <p:sp>
         <p:nvSpPr>
-          <p:cNvPr id="254786309" name="Notes Placeholder 2"/>
+          <p:cNvPr id="1998286611" name="Notes Placeholder 2"/>
           <p:cNvSpPr>
             <a:spLocks noGrp="1"/>
           </p:cNvSpPr>
@@ -552,7 +552,7 @@
       </p:sp>
       <p:sp>
         <p:nvSpPr>
-          <p:cNvPr id="91799789" name="Slide Number Placeholder 3"/>
+          <p:cNvPr id="1189683453" name="Slide Number Placeholder 3"/>
           <p:cNvSpPr>
             <a:spLocks noGrp="1"/>
           </p:cNvSpPr>
@@ -603,7 +603,7 @@
       </p:grpSpPr>
       <p:sp>
         <p:nvSpPr>
-          <p:cNvPr id="2" name="Slide Image Placeholder 1"/>
+          <p:cNvPr id="725786711" name="Slide Image Placeholder 1"/>
           <p:cNvSpPr>
             <a:spLocks noChangeAspect="1" noGrp="1" noRot="1"/>
           </p:cNvSpPr>
@@ -615,7 +615,7 @@
       </p:sp>
       <p:sp>
         <p:nvSpPr>
-          <p:cNvPr id="3" name="Notes Placeholder 2"/>
+          <p:cNvPr id="337901232" name="Notes Placeholder 2"/>
           <p:cNvSpPr>
             <a:spLocks noGrp="1"/>
           </p:cNvSpPr>
@@ -637,7 +637,7 @@
       </p:sp>
       <p:sp>
         <p:nvSpPr>
-          <p:cNvPr id="4" name="Slide Number Placeholder 3"/>
+          <p:cNvPr id="269292706" name="Slide Number Placeholder 3"/>
           <p:cNvSpPr>
             <a:spLocks noGrp="1"/>
           </p:cNvSpPr>
@@ -688,7 +688,7 @@
       </p:grpSpPr>
       <p:sp>
         <p:nvSpPr>
-          <p:cNvPr id="484135688" name="Slide Image Placeholder 1"/>
+          <p:cNvPr id="1852748268" name="Slide Image Placeholder 1"/>
           <p:cNvSpPr>
             <a:spLocks noChangeAspect="1" noGrp="1" noRot="1"/>
           </p:cNvSpPr>
@@ -700,7 +700,7 @@
       </p:sp>
       <p:sp>
         <p:nvSpPr>
-          <p:cNvPr id="1661508802" name="Notes Placeholder 2"/>
+          <p:cNvPr id="1357174657" name="Notes Placeholder 2"/>
           <p:cNvSpPr>
             <a:spLocks noGrp="1"/>
           </p:cNvSpPr>
@@ -722,7 +722,7 @@
       </p:sp>
       <p:sp>
         <p:nvSpPr>
-          <p:cNvPr id="1449619410" name="Slide Number Placeholder 3"/>
+          <p:cNvPr id="1087728446" name="Slide Number Placeholder 3"/>
           <p:cNvSpPr>
             <a:spLocks noGrp="1"/>
           </p:cNvSpPr>
@@ -773,7 +773,7 @@
       </p:grpSpPr>
       <p:sp>
         <p:nvSpPr>
-          <p:cNvPr id="1711437855" name="Slide Image Placeholder 1"/>
+          <p:cNvPr id="1724582075" name="Slide Image Placeholder 1"/>
           <p:cNvSpPr>
             <a:spLocks noChangeAspect="1" noGrp="1" noRot="1"/>
           </p:cNvSpPr>
@@ -785,7 +785,7 @@
       </p:sp>
       <p:sp>
         <p:nvSpPr>
-          <p:cNvPr id="190294422" name="Notes Placeholder 2"/>
+          <p:cNvPr id="126192588" name="Notes Placeholder 2"/>
           <p:cNvSpPr>
             <a:spLocks noGrp="1"/>
           </p:cNvSpPr>
@@ -807,7 +807,7 @@
       </p:sp>
       <p:sp>
         <p:nvSpPr>
-          <p:cNvPr id="118701156" name="Slide Number Placeholder 3"/>
+          <p:cNvPr id="1314039635" name="Slide Number Placeholder 3"/>
           <p:cNvSpPr>
             <a:spLocks noGrp="1"/>
           </p:cNvSpPr>
@@ -858,7 +858,7 @@
       </p:grpSpPr>
       <p:sp>
         <p:nvSpPr>
-          <p:cNvPr id="2" name="Slide Image Placeholder 1"/>
+          <p:cNvPr id="1190502552" name="Slide Image Placeholder 1"/>
           <p:cNvSpPr>
             <a:spLocks noChangeAspect="1" noGrp="1" noRot="1"/>
           </p:cNvSpPr>
@@ -870,7 +870,7 @@
       </p:sp>
       <p:sp>
         <p:nvSpPr>
-          <p:cNvPr id="3" name="Notes Placeholder 2"/>
+          <p:cNvPr id="38140062" name="Notes Placeholder 2"/>
           <p:cNvSpPr>
             <a:spLocks noGrp="1"/>
           </p:cNvSpPr>
@@ -892,7 +892,7 @@
       </p:sp>
       <p:sp>
         <p:nvSpPr>
-          <p:cNvPr id="4" name="Slide Number Placeholder 3"/>
+          <p:cNvPr id="791768141" name="Slide Number Placeholder 3"/>
           <p:cNvSpPr>
             <a:spLocks noGrp="1"/>
           </p:cNvSpPr>
@@ -943,7 +943,7 @@
       </p:grpSpPr>
       <p:sp>
         <p:nvSpPr>
-          <p:cNvPr id="2" name="Slide Image Placeholder 1"/>
+          <p:cNvPr id="1390815669" name="Slide Image Placeholder 1"/>
           <p:cNvSpPr>
             <a:spLocks noChangeAspect="1" noGrp="1" noRot="1"/>
           </p:cNvSpPr>
@@ -955,7 +955,7 @@
       </p:sp>
       <p:sp>
         <p:nvSpPr>
-          <p:cNvPr id="3" name="Notes Placeholder 2"/>
+          <p:cNvPr id="1800811085" name="Notes Placeholder 2"/>
           <p:cNvSpPr>
             <a:spLocks noGrp="1"/>
           </p:cNvSpPr>
@@ -977,7 +977,7 @@
       </p:sp>
       <p:sp>
         <p:nvSpPr>
-          <p:cNvPr id="4" name="Slide Number Placeholder 3"/>
+          <p:cNvPr id="1309133581" name="Slide Number Placeholder 3"/>
           <p:cNvSpPr>
             <a:spLocks noGrp="1"/>
           </p:cNvSpPr>
@@ -1028,7 +1028,7 @@
       </p:grpSpPr>
       <p:sp>
         <p:nvSpPr>
-          <p:cNvPr id="2" name="Slide Image Placeholder 1"/>
+          <p:cNvPr id="517422749" name="Slide Image Placeholder 1"/>
           <p:cNvSpPr>
             <a:spLocks noChangeAspect="1" noGrp="1" noRot="1"/>
           </p:cNvSpPr>
@@ -1040,7 +1040,7 @@
       </p:sp>
       <p:sp>
         <p:nvSpPr>
-          <p:cNvPr id="3" name="Notes Placeholder 2"/>
+          <p:cNvPr id="868911826" name="Notes Placeholder 2"/>
           <p:cNvSpPr>
             <a:spLocks noGrp="1"/>
           </p:cNvSpPr>
@@ -1062,7 +1062,7 @@
       </p:sp>
       <p:sp>
         <p:nvSpPr>
-          <p:cNvPr id="4" name="Slide Number Placeholder 3"/>
+          <p:cNvPr id="1242367423" name="Slide Number Placeholder 3"/>
           <p:cNvSpPr>
             <a:spLocks noGrp="1"/>
           </p:cNvSpPr>
@@ -1113,7 +1113,7 @@
       </p:grpSpPr>
       <p:sp>
         <p:nvSpPr>
-          <p:cNvPr id="2" name="Slide Image Placeholder 1"/>
+          <p:cNvPr id="805387009" name="Slide Image Placeholder 1"/>
           <p:cNvSpPr>
             <a:spLocks noChangeAspect="1" noGrp="1" noRot="1"/>
           </p:cNvSpPr>
@@ -1125,7 +1125,7 @@
       </p:sp>
       <p:sp>
         <p:nvSpPr>
-          <p:cNvPr id="3" name="Notes Placeholder 2"/>
+          <p:cNvPr id="150416866" name="Notes Placeholder 2"/>
           <p:cNvSpPr>
             <a:spLocks noGrp="1"/>
           </p:cNvSpPr>
@@ -1147,7 +1147,7 @@
       </p:sp>
       <p:sp>
         <p:nvSpPr>
-          <p:cNvPr id="4" name="Slide Number Placeholder 3"/>
+          <p:cNvPr id="595954868" name="Slide Number Placeholder 3"/>
           <p:cNvSpPr>
             <a:spLocks noGrp="1"/>
           </p:cNvSpPr>
@@ -1198,7 +1198,7 @@
       </p:grpSpPr>
       <p:sp>
         <p:nvSpPr>
-          <p:cNvPr id="2032855647" name="Shape 1059"/>
+          <p:cNvPr id="2100050992" name="Shape 1059"/>
           <p:cNvSpPr>
             <a:spLocks noChangeArrowheads="1" noGrp="1"/>
           </p:cNvSpPr>
@@ -1321,7 +1321,7 @@
       </p:sp>
       <p:sp>
         <p:nvSpPr>
-          <p:cNvPr id="194205068" name="Shape 1060"/>
+          <p:cNvPr id="477092650" name="Shape 1060"/>
           <p:cNvSpPr>
             <a:spLocks noChangeArrowheads="1" noGrp="1"/>
           </p:cNvSpPr>
@@ -1330,7 +1330,7 @@
         <p:spPr bwMode="auto">
           <a:xfrm>
             <a:off x="1309514" y="1839834"/>
-            <a:ext cx="4011787" cy="1314325"/>
+            <a:ext cx="4011787" cy="1314324"/>
           </a:xfrm>
           <a:custGeom>
             <a:avLst/>
@@ -1412,7 +1412,7 @@
       </p:sp>
       <p:sp>
         <p:nvSpPr>
-          <p:cNvPr id="176740447" name="Shape 1061"/>
+          <p:cNvPr id="1715425063" name="Shape 1061"/>
           <p:cNvSpPr>
             <a:spLocks noChangeArrowheads="1" noGrp="1"/>
           </p:cNvSpPr>
@@ -1420,7 +1420,7 @@
         </p:nvSpPr>
         <p:spPr bwMode="auto">
           <a:xfrm>
-            <a:off x="6567031" y="4629133"/>
+            <a:off x="6567030" y="4629133"/>
             <a:ext cx="5395523" cy="2231707"/>
           </a:xfrm>
           <a:custGeom>
@@ -1498,7 +1498,7 @@
       </p:sp>
       <p:sp>
         <p:nvSpPr>
-          <p:cNvPr id="2069665106" name="Shape 1062"/>
+          <p:cNvPr id="1242758269" name="Shape 1062"/>
           <p:cNvSpPr>
             <a:spLocks noChangeArrowheads="1" noGrp="1"/>
           </p:cNvSpPr>
@@ -1576,7 +1576,7 @@
       </p:sp>
       <p:sp>
         <p:nvSpPr>
-          <p:cNvPr id="2044657836" name="Shape 1063"/>
+          <p:cNvPr id="77059856" name="Shape 1063"/>
           <p:cNvSpPr>
             <a:spLocks noChangeArrowheads="1" noGrp="1"/>
           </p:cNvSpPr>
@@ -1654,7 +1654,7 @@
       </p:sp>
       <p:sp>
         <p:nvSpPr>
-          <p:cNvPr id="1117312919" name="Subtitle 2"/>
+          <p:cNvPr id="925381226" name="Subtitle 2"/>
           <p:cNvSpPr>
             <a:spLocks noGrp="1"/>
           </p:cNvSpPr>
@@ -1665,7 +1665,7 @@
         <p:spPr bwMode="auto">
           <a:xfrm>
             <a:off x="4655839" y="2708919"/>
-            <a:ext cx="6720746" cy="720079"/>
+            <a:ext cx="6720745" cy="720079"/>
           </a:xfrm>
         </p:spPr>
         <p:txBody>
@@ -1777,7 +1777,7 @@
       </p:sp>
       <p:sp>
         <p:nvSpPr>
-          <p:cNvPr id="12211426" name="Date Placeholder 3"/>
+          <p:cNvPr id="344710206" name="Date Placeholder 3"/>
           <p:cNvSpPr>
             <a:spLocks noGrp="1"/>
           </p:cNvSpPr>
@@ -1803,7 +1803,7 @@
       </p:sp>
       <p:sp>
         <p:nvSpPr>
-          <p:cNvPr id="1450875021" name="Footer Placeholder 4"/>
+          <p:cNvPr id="268041474" name="Footer Placeholder 4"/>
           <p:cNvSpPr>
             <a:spLocks noGrp="1"/>
           </p:cNvSpPr>
@@ -1825,7 +1825,7 @@
       </p:sp>
       <p:sp>
         <p:nvSpPr>
-          <p:cNvPr id="278225978" name="Slide Number Placeholder 5"/>
+          <p:cNvPr id="2090864370" name="Slide Number Placeholder 5"/>
           <p:cNvSpPr>
             <a:spLocks noGrp="1"/>
           </p:cNvSpPr>
@@ -1851,7 +1851,7 @@
       </p:sp>
       <p:sp>
         <p:nvSpPr>
-          <p:cNvPr id="719060107" name="Title 6"/>
+          <p:cNvPr id="841860465" name="Title 6"/>
           <p:cNvSpPr>
             <a:spLocks noGrp="1"/>
           </p:cNvSpPr>
@@ -1862,7 +1862,7 @@
         <p:spPr bwMode="auto">
           <a:xfrm>
             <a:off x="4595833" y="1808820"/>
-            <a:ext cx="6720746" cy="720079"/>
+            <a:ext cx="6720745" cy="720079"/>
           </a:xfrm>
         </p:spPr>
         <p:txBody>
@@ -1911,7 +1911,7 @@
       </p:grpSpPr>
       <p:sp>
         <p:nvSpPr>
-          <p:cNvPr id="1618628280" name="Title 1"/>
+          <p:cNvPr id="1079378486" name="Title 1"/>
           <p:cNvSpPr>
             <a:spLocks noGrp="1"/>
           </p:cNvSpPr>
@@ -1937,7 +1937,7 @@
       </p:sp>
       <p:sp>
         <p:nvSpPr>
-          <p:cNvPr id="1745661622" name="Vertical Text Placeholder 2"/>
+          <p:cNvPr id="1296384963" name="Vertical Text Placeholder 2"/>
           <p:cNvSpPr>
             <a:spLocks noGrp="1"/>
           </p:cNvSpPr>
@@ -2003,7 +2003,7 @@
       </p:sp>
       <p:sp>
         <p:nvSpPr>
-          <p:cNvPr id="1573702923" name="Date Placeholder 3"/>
+          <p:cNvPr id="813786314" name="Date Placeholder 3"/>
           <p:cNvSpPr>
             <a:spLocks noGrp="1"/>
           </p:cNvSpPr>
@@ -2029,7 +2029,7 @@
       </p:sp>
       <p:sp>
         <p:nvSpPr>
-          <p:cNvPr id="1951876876" name="Footer Placeholder 4"/>
+          <p:cNvPr id="703941209" name="Footer Placeholder 4"/>
           <p:cNvSpPr>
             <a:spLocks noGrp="1"/>
           </p:cNvSpPr>
@@ -2051,7 +2051,7 @@
       </p:sp>
       <p:sp>
         <p:nvSpPr>
-          <p:cNvPr id="412648851" name="Slide Number Placeholder 5"/>
+          <p:cNvPr id="1560240397" name="Slide Number Placeholder 5"/>
           <p:cNvSpPr>
             <a:spLocks noGrp="1"/>
           </p:cNvSpPr>
@@ -2102,7 +2102,7 @@
       </p:grpSpPr>
       <p:sp>
         <p:nvSpPr>
-          <p:cNvPr id="2034674868" name="Vertical Title 1"/>
+          <p:cNvPr id="1592538602" name="Vertical Title 1"/>
           <p:cNvSpPr>
             <a:spLocks noGrp="1"/>
           </p:cNvSpPr>
@@ -2137,7 +2137,7 @@
       </p:sp>
       <p:sp>
         <p:nvSpPr>
-          <p:cNvPr id="454304876" name="Vertical Text Placeholder 2"/>
+          <p:cNvPr id="1400771874" name="Vertical Text Placeholder 2"/>
           <p:cNvSpPr>
             <a:spLocks noGrp="1"/>
           </p:cNvSpPr>
@@ -2208,7 +2208,7 @@
       </p:sp>
       <p:sp>
         <p:nvSpPr>
-          <p:cNvPr id="2107614734" name="Date Placeholder 3"/>
+          <p:cNvPr id="199097420" name="Date Placeholder 3"/>
           <p:cNvSpPr>
             <a:spLocks noGrp="1"/>
           </p:cNvSpPr>
@@ -2234,7 +2234,7 @@
       </p:sp>
       <p:sp>
         <p:nvSpPr>
-          <p:cNvPr id="330142909" name="Footer Placeholder 4"/>
+          <p:cNvPr id="823908414" name="Footer Placeholder 4"/>
           <p:cNvSpPr>
             <a:spLocks noGrp="1"/>
           </p:cNvSpPr>
@@ -2256,7 +2256,7 @@
       </p:sp>
       <p:sp>
         <p:nvSpPr>
-          <p:cNvPr id="1282235155" name="Slide Number Placeholder 5"/>
+          <p:cNvPr id="828831871" name="Slide Number Placeholder 5"/>
           <p:cNvSpPr>
             <a:spLocks noGrp="1"/>
           </p:cNvSpPr>
@@ -2307,7 +2307,7 @@
       </p:grpSpPr>
       <p:sp>
         <p:nvSpPr>
-          <p:cNvPr id="912019210" name="Title 1"/>
+          <p:cNvPr id="504401428" name="Title 1"/>
           <p:cNvSpPr>
             <a:spLocks noGrp="1"/>
           </p:cNvSpPr>
@@ -2333,7 +2333,7 @@
       </p:sp>
       <p:sp>
         <p:nvSpPr>
-          <p:cNvPr id="1344423871" name="Content Placeholder 2"/>
+          <p:cNvPr id="99607868" name="Content Placeholder 2"/>
           <p:cNvSpPr>
             <a:spLocks noGrp="1"/>
           </p:cNvSpPr>
@@ -2399,7 +2399,7 @@
       </p:sp>
       <p:sp>
         <p:nvSpPr>
-          <p:cNvPr id="89791988" name="Date Placeholder 3"/>
+          <p:cNvPr id="2009377059" name="Date Placeholder 3"/>
           <p:cNvSpPr>
             <a:spLocks noGrp="1"/>
           </p:cNvSpPr>
@@ -2425,7 +2425,7 @@
       </p:sp>
       <p:sp>
         <p:nvSpPr>
-          <p:cNvPr id="317169302" name="Footer Placeholder 4"/>
+          <p:cNvPr id="1702959065" name="Footer Placeholder 4"/>
           <p:cNvSpPr>
             <a:spLocks noGrp="1"/>
           </p:cNvSpPr>
@@ -2447,7 +2447,7 @@
       </p:sp>
       <p:sp>
         <p:nvSpPr>
-          <p:cNvPr id="864975027" name="Slide Number Placeholder 5"/>
+          <p:cNvPr id="879856845" name="Slide Number Placeholder 5"/>
           <p:cNvSpPr>
             <a:spLocks noGrp="1"/>
           </p:cNvSpPr>
@@ -2498,7 +2498,7 @@
       </p:grpSpPr>
       <p:sp>
         <p:nvSpPr>
-          <p:cNvPr id="1661012762" name="Title 1"/>
+          <p:cNvPr id="1535263426" name="Title 1"/>
           <p:cNvSpPr>
             <a:spLocks noGrp="1"/>
           </p:cNvSpPr>
@@ -2533,7 +2533,7 @@
       </p:sp>
       <p:sp>
         <p:nvSpPr>
-          <p:cNvPr id="1345778609" name="Text Placeholder 2"/>
+          <p:cNvPr id="765218938" name="Text Placeholder 2"/>
           <p:cNvSpPr>
             <a:spLocks noGrp="1"/>
           </p:cNvSpPr>
@@ -2655,7 +2655,7 @@
       </p:sp>
       <p:sp>
         <p:nvSpPr>
-          <p:cNvPr id="1281335454" name="Date Placeholder 3"/>
+          <p:cNvPr id="1409206797" name="Date Placeholder 3"/>
           <p:cNvSpPr>
             <a:spLocks noGrp="1"/>
           </p:cNvSpPr>
@@ -2681,7 +2681,7 @@
       </p:sp>
       <p:sp>
         <p:nvSpPr>
-          <p:cNvPr id="577625947" name="Footer Placeholder 4"/>
+          <p:cNvPr id="985409631" name="Footer Placeholder 4"/>
           <p:cNvSpPr>
             <a:spLocks noGrp="1"/>
           </p:cNvSpPr>
@@ -2703,7 +2703,7 @@
       </p:sp>
       <p:sp>
         <p:nvSpPr>
-          <p:cNvPr id="1061852663" name="Slide Number Placeholder 5"/>
+          <p:cNvPr id="230801103" name="Slide Number Placeholder 5"/>
           <p:cNvSpPr>
             <a:spLocks noGrp="1"/>
           </p:cNvSpPr>
@@ -2754,7 +2754,7 @@
       </p:grpSpPr>
       <p:sp>
         <p:nvSpPr>
-          <p:cNvPr id="970119705" name="Title 1"/>
+          <p:cNvPr id="568005471" name="Title 1"/>
           <p:cNvSpPr>
             <a:spLocks noGrp="1"/>
           </p:cNvSpPr>
@@ -2780,7 +2780,7 @@
       </p:sp>
       <p:sp>
         <p:nvSpPr>
-          <p:cNvPr id="278783105" name="Content Placeholder 2"/>
+          <p:cNvPr id="972165729" name="Content Placeholder 2"/>
           <p:cNvSpPr>
             <a:spLocks noGrp="1"/>
           </p:cNvSpPr>
@@ -2879,7 +2879,7 @@
       </p:sp>
       <p:sp>
         <p:nvSpPr>
-          <p:cNvPr id="1998220438" name="Content Placeholder 3"/>
+          <p:cNvPr id="1747858669" name="Content Placeholder 3"/>
           <p:cNvSpPr>
             <a:spLocks noGrp="1"/>
           </p:cNvSpPr>
@@ -2978,7 +2978,7 @@
       </p:sp>
       <p:sp>
         <p:nvSpPr>
-          <p:cNvPr id="759800713" name="Date Placeholder 4"/>
+          <p:cNvPr id="1816110471" name="Date Placeholder 4"/>
           <p:cNvSpPr>
             <a:spLocks noGrp="1"/>
           </p:cNvSpPr>
@@ -3004,7 +3004,7 @@
       </p:sp>
       <p:sp>
         <p:nvSpPr>
-          <p:cNvPr id="1122721058" name="Footer Placeholder 5"/>
+          <p:cNvPr id="1206403655" name="Footer Placeholder 5"/>
           <p:cNvSpPr>
             <a:spLocks noGrp="1"/>
           </p:cNvSpPr>
@@ -3026,7 +3026,7 @@
       </p:sp>
       <p:sp>
         <p:nvSpPr>
-          <p:cNvPr id="1225507292" name="Slide Number Placeholder 6"/>
+          <p:cNvPr id="1007129099" name="Slide Number Placeholder 6"/>
           <p:cNvSpPr>
             <a:spLocks noGrp="1"/>
           </p:cNvSpPr>
@@ -3077,7 +3077,7 @@
       </p:grpSpPr>
       <p:sp>
         <p:nvSpPr>
-          <p:cNvPr id="769810056" name="Title 1"/>
+          <p:cNvPr id="888148875" name="Title 1"/>
           <p:cNvSpPr>
             <a:spLocks noGrp="1"/>
           </p:cNvSpPr>
@@ -3107,7 +3107,7 @@
       </p:sp>
       <p:sp>
         <p:nvSpPr>
-          <p:cNvPr id="1464072790" name="Text Placeholder 2"/>
+          <p:cNvPr id="1824995368" name="Text Placeholder 2"/>
           <p:cNvSpPr>
             <a:spLocks noGrp="1"/>
           </p:cNvSpPr>
@@ -3175,7 +3175,7 @@
       </p:sp>
       <p:sp>
         <p:nvSpPr>
-          <p:cNvPr id="1681769507" name="Content Placeholder 3"/>
+          <p:cNvPr id="1111730279" name="Content Placeholder 3"/>
           <p:cNvSpPr>
             <a:spLocks noGrp="1"/>
           </p:cNvSpPr>
@@ -3274,7 +3274,7 @@
       </p:sp>
       <p:sp>
         <p:nvSpPr>
-          <p:cNvPr id="973858310" name="Text Placeholder 4"/>
+          <p:cNvPr id="58167049" name="Text Placeholder 4"/>
           <p:cNvSpPr>
             <a:spLocks noGrp="1"/>
           </p:cNvSpPr>
@@ -3342,7 +3342,7 @@
       </p:sp>
       <p:sp>
         <p:nvSpPr>
-          <p:cNvPr id="1023342202" name="Content Placeholder 5"/>
+          <p:cNvPr id="2102293969" name="Content Placeholder 5"/>
           <p:cNvSpPr>
             <a:spLocks noGrp="1"/>
           </p:cNvSpPr>
@@ -3441,7 +3441,7 @@
       </p:sp>
       <p:sp>
         <p:nvSpPr>
-          <p:cNvPr id="1851376676" name="Date Placeholder 6"/>
+          <p:cNvPr id="1055374968" name="Date Placeholder 6"/>
           <p:cNvSpPr>
             <a:spLocks noGrp="1"/>
           </p:cNvSpPr>
@@ -3467,7 +3467,7 @@
       </p:sp>
       <p:sp>
         <p:nvSpPr>
-          <p:cNvPr id="1179128840" name="Footer Placeholder 7"/>
+          <p:cNvPr id="611502448" name="Footer Placeholder 7"/>
           <p:cNvSpPr>
             <a:spLocks noGrp="1"/>
           </p:cNvSpPr>
@@ -3489,7 +3489,7 @@
       </p:sp>
       <p:sp>
         <p:nvSpPr>
-          <p:cNvPr id="2129553665" name="Slide Number Placeholder 8"/>
+          <p:cNvPr id="1034476750" name="Slide Number Placeholder 8"/>
           <p:cNvSpPr>
             <a:spLocks noGrp="1"/>
           </p:cNvSpPr>
@@ -3540,7 +3540,7 @@
       </p:grpSpPr>
       <p:sp>
         <p:nvSpPr>
-          <p:cNvPr id="1366451878" name="Title 1"/>
+          <p:cNvPr id="777698473" name="Title 1"/>
           <p:cNvSpPr>
             <a:spLocks noGrp="1"/>
           </p:cNvSpPr>
@@ -3566,7 +3566,7 @@
       </p:sp>
       <p:sp>
         <p:nvSpPr>
-          <p:cNvPr id="1128519446" name="Date Placeholder 2"/>
+          <p:cNvPr id="1042919619" name="Date Placeholder 2"/>
           <p:cNvSpPr>
             <a:spLocks noGrp="1"/>
           </p:cNvSpPr>
@@ -3592,7 +3592,7 @@
       </p:sp>
       <p:sp>
         <p:nvSpPr>
-          <p:cNvPr id="1650671328" name="Footer Placeholder 3"/>
+          <p:cNvPr id="1564284824" name="Footer Placeholder 3"/>
           <p:cNvSpPr>
             <a:spLocks noGrp="1"/>
           </p:cNvSpPr>
@@ -3614,7 +3614,7 @@
       </p:sp>
       <p:sp>
         <p:nvSpPr>
-          <p:cNvPr id="1604225890" name="Slide Number Placeholder 4"/>
+          <p:cNvPr id="1470099786" name="Slide Number Placeholder 4"/>
           <p:cNvSpPr>
             <a:spLocks noGrp="1"/>
           </p:cNvSpPr>
@@ -3665,7 +3665,7 @@
       </p:grpSpPr>
       <p:sp>
         <p:nvSpPr>
-          <p:cNvPr id="1898864470" name="Date Placeholder 1"/>
+          <p:cNvPr id="1156939109" name="Date Placeholder 1"/>
           <p:cNvSpPr>
             <a:spLocks noGrp="1"/>
           </p:cNvSpPr>
@@ -3691,7 +3691,7 @@
       </p:sp>
       <p:sp>
         <p:nvSpPr>
-          <p:cNvPr id="955558381" name="Footer Placeholder 2"/>
+          <p:cNvPr id="1335371872" name="Footer Placeholder 2"/>
           <p:cNvSpPr>
             <a:spLocks noGrp="1"/>
           </p:cNvSpPr>
@@ -3713,7 +3713,7 @@
       </p:sp>
       <p:sp>
         <p:nvSpPr>
-          <p:cNvPr id="1464442237" name="Slide Number Placeholder 3"/>
+          <p:cNvPr id="1212802632" name="Slide Number Placeholder 3"/>
           <p:cNvSpPr>
             <a:spLocks noGrp="1"/>
           </p:cNvSpPr>
@@ -3764,7 +3764,7 @@
       </p:grpSpPr>
       <p:sp>
         <p:nvSpPr>
-          <p:cNvPr id="256755852" name="Title 1"/>
+          <p:cNvPr id="332789494" name="Title 1"/>
           <p:cNvSpPr>
             <a:spLocks noGrp="1"/>
           </p:cNvSpPr>
@@ -3799,7 +3799,7 @@
       </p:sp>
       <p:sp>
         <p:nvSpPr>
-          <p:cNvPr id="91108666" name="Content Placeholder 2"/>
+          <p:cNvPr id="132428119" name="Content Placeholder 2"/>
           <p:cNvSpPr>
             <a:spLocks noGrp="1"/>
           </p:cNvSpPr>
@@ -3898,7 +3898,7 @@
       </p:sp>
       <p:sp>
         <p:nvSpPr>
-          <p:cNvPr id="1682747367" name="Text Placeholder 3"/>
+          <p:cNvPr id="1933668252" name="Text Placeholder 3"/>
           <p:cNvSpPr>
             <a:spLocks noGrp="1"/>
           </p:cNvSpPr>
@@ -3966,7 +3966,7 @@
       </p:sp>
       <p:sp>
         <p:nvSpPr>
-          <p:cNvPr id="907633907" name="Date Placeholder 4"/>
+          <p:cNvPr id="245776299" name="Date Placeholder 4"/>
           <p:cNvSpPr>
             <a:spLocks noGrp="1"/>
           </p:cNvSpPr>
@@ -3992,7 +3992,7 @@
       </p:sp>
       <p:sp>
         <p:nvSpPr>
-          <p:cNvPr id="413825672" name="Footer Placeholder 5"/>
+          <p:cNvPr id="2133755214" name="Footer Placeholder 5"/>
           <p:cNvSpPr>
             <a:spLocks noGrp="1"/>
           </p:cNvSpPr>
@@ -4014,7 +4014,7 @@
       </p:sp>
       <p:sp>
         <p:nvSpPr>
-          <p:cNvPr id="1014989967" name="Slide Number Placeholder 6"/>
+          <p:cNvPr id="2080551175" name="Slide Number Placeholder 6"/>
           <p:cNvSpPr>
             <a:spLocks noGrp="1"/>
           </p:cNvSpPr>
@@ -4065,7 +4065,7 @@
       </p:grpSpPr>
       <p:sp>
         <p:nvSpPr>
-          <p:cNvPr id="1357874374" name="Title 1"/>
+          <p:cNvPr id="1495438180" name="Title 1"/>
           <p:cNvSpPr>
             <a:spLocks noGrp="1"/>
           </p:cNvSpPr>
@@ -4100,7 +4100,7 @@
       </p:sp>
       <p:sp>
         <p:nvSpPr>
-          <p:cNvPr id="1879243423" name="Picture Placeholder 2"/>
+          <p:cNvPr id="1740065644" name="Picture Placeholder 2"/>
           <p:cNvSpPr>
             <a:spLocks noGrp="1"/>
           </p:cNvSpPr>
@@ -4164,7 +4164,7 @@
       </p:sp>
       <p:sp>
         <p:nvSpPr>
-          <p:cNvPr id="848030293" name="Text Placeholder 3"/>
+          <p:cNvPr id="1464992938" name="Text Placeholder 3"/>
           <p:cNvSpPr>
             <a:spLocks noGrp="1"/>
           </p:cNvSpPr>
@@ -4232,7 +4232,7 @@
       </p:sp>
       <p:sp>
         <p:nvSpPr>
-          <p:cNvPr id="589105999" name="Date Placeholder 4"/>
+          <p:cNvPr id="442259663" name="Date Placeholder 4"/>
           <p:cNvSpPr>
             <a:spLocks noGrp="1"/>
           </p:cNvSpPr>
@@ -4258,7 +4258,7 @@
       </p:sp>
       <p:sp>
         <p:nvSpPr>
-          <p:cNvPr id="872362188" name="Footer Placeholder 5"/>
+          <p:cNvPr id="912878615" name="Footer Placeholder 5"/>
           <p:cNvSpPr>
             <a:spLocks noGrp="1"/>
           </p:cNvSpPr>
@@ -4280,7 +4280,7 @@
       </p:sp>
       <p:sp>
         <p:nvSpPr>
-          <p:cNvPr id="690452330" name="Slide Number Placeholder 6"/>
+          <p:cNvPr id="1145026640" name="Slide Number Placeholder 6"/>
           <p:cNvSpPr>
             <a:spLocks noGrp="1"/>
           </p:cNvSpPr>
@@ -4336,7 +4336,7 @@
       </p:grpSpPr>
       <p:sp>
         <p:nvSpPr>
-          <p:cNvPr id="788348983" name="Shape 1059"/>
+          <p:cNvPr id="190609668" name="Shape 1059"/>
           <p:cNvSpPr>
             <a:spLocks noChangeArrowheads="1" noGrp="1"/>
           </p:cNvSpPr>
@@ -4414,7 +4414,7 @@
       </p:sp>
       <p:sp>
         <p:nvSpPr>
-          <p:cNvPr id="1931685728" name="Shape 1060"/>
+          <p:cNvPr id="918581379" name="Shape 1060"/>
           <p:cNvSpPr>
             <a:spLocks noChangeArrowheads="1" noGrp="1"/>
           </p:cNvSpPr>
@@ -4495,7 +4495,7 @@
       </p:sp>
       <p:sp>
         <p:nvSpPr>
-          <p:cNvPr id="990147445" name="Shape 1061"/>
+          <p:cNvPr id="615026735" name="Shape 1061"/>
           <p:cNvSpPr>
             <a:spLocks noChangeArrowheads="1" noGrp="1"/>
           </p:cNvSpPr>
@@ -4503,7 +4503,7 @@
         </p:nvSpPr>
         <p:spPr bwMode="auto">
           <a:xfrm>
-            <a:off x="1637457" y="1"/>
+            <a:off x="1637456" y="1"/>
             <a:ext cx="3839633" cy="2609650"/>
           </a:xfrm>
           <a:custGeom>
@@ -4613,7 +4613,7 @@
       </p:sp>
       <p:sp>
         <p:nvSpPr>
-          <p:cNvPr id="1565859893" name="Title 1"/>
+          <p:cNvPr id="1371959880" name="Title 1"/>
           <p:cNvSpPr>
             <a:spLocks noGrp="1"/>
           </p:cNvSpPr>
@@ -4649,7 +4649,7 @@
       </p:sp>
       <p:sp>
         <p:nvSpPr>
-          <p:cNvPr id="1835138980" name="Text Placeholder 2"/>
+          <p:cNvPr id="818630471" name="Text Placeholder 2"/>
           <p:cNvSpPr>
             <a:spLocks noGrp="1"/>
           </p:cNvSpPr>
@@ -4725,7 +4725,7 @@
       </p:sp>
       <p:sp>
         <p:nvSpPr>
-          <p:cNvPr id="1037975574" name="Date Placeholder 3"/>
+          <p:cNvPr id="283372904" name="Date Placeholder 3"/>
           <p:cNvSpPr>
             <a:spLocks noGrp="1"/>
           </p:cNvSpPr>
@@ -4736,7 +4736,7 @@
         <p:spPr bwMode="auto">
           <a:xfrm>
             <a:off x="609599" y="6356351"/>
-            <a:ext cx="2844799" cy="365125"/>
+            <a:ext cx="2844798" cy="365125"/>
           </a:xfrm>
           <a:prstGeom prst="rect">
             <a:avLst/>
@@ -4769,7 +4769,7 @@
       </p:sp>
       <p:sp>
         <p:nvSpPr>
-          <p:cNvPr id="590172969" name="Footer Placeholder 4"/>
+          <p:cNvPr id="1484487980" name="Footer Placeholder 4"/>
           <p:cNvSpPr>
             <a:spLocks noGrp="1"/>
           </p:cNvSpPr>
@@ -4809,7 +4809,7 @@
       </p:sp>
       <p:sp>
         <p:nvSpPr>
-          <p:cNvPr id="1268305943" name="Slide Number Placeholder 5"/>
+          <p:cNvPr id="1579864256" name="Slide Number Placeholder 5"/>
           <p:cNvSpPr>
             <a:spLocks noGrp="1"/>
           </p:cNvSpPr>
@@ -4820,7 +4820,7 @@
         <p:spPr bwMode="auto">
           <a:xfrm>
             <a:off x="8737599" y="6356351"/>
-            <a:ext cx="2844799" cy="365125"/>
+            <a:ext cx="2844798" cy="365125"/>
           </a:xfrm>
           <a:prstGeom prst="rect">
             <a:avLst/>
@@ -5158,7 +5158,7 @@
       </p:grpSpPr>
       <p:sp>
         <p:nvSpPr>
-          <p:cNvPr id="1018106433" name="Title 1"/>
+          <p:cNvPr id="1009535222" name="Title 1"/>
           <p:cNvSpPr>
             <a:spLocks noGrp="1"/>
           </p:cNvSpPr>
@@ -5168,7 +5168,7 @@
         </p:nvSpPr>
         <p:spPr bwMode="auto">
           <a:xfrm flipH="0" flipV="0">
-            <a:off x="1646999" y="1808820"/>
+            <a:off x="1646998" y="1808820"/>
             <a:ext cx="9669579" cy="720079"/>
           </a:xfrm>
         </p:spPr>
@@ -5245,7 +5245,7 @@
       </p:sp>
       <p:sp>
         <p:nvSpPr>
-          <p:cNvPr id="1287234002" name="Subtitle 2"/>
+          <p:cNvPr id="1596585459" name="Subtitle 2"/>
           <p:cNvSpPr>
             <a:spLocks noGrp="1"/>
           </p:cNvSpPr>
@@ -5300,7 +5300,7 @@
       </p:grpSpPr>
       <p:sp>
         <p:nvSpPr>
-          <p:cNvPr id="852775408" name="Title 1"/>
+          <p:cNvPr id="941366923" name="Title 1"/>
           <p:cNvSpPr>
             <a:spLocks noGrp="1"/>
           </p:cNvSpPr>
@@ -5336,7 +5336,7 @@
       </p:sp>
       <p:sp>
         <p:nvSpPr>
-          <p:cNvPr id="1075541683" name="Content Placeholder 2"/>
+          <p:cNvPr id="855526098" name="Content Placeholder 2"/>
           <p:cNvSpPr>
             <a:spLocks noGrp="1"/>
           </p:cNvSpPr>
@@ -5608,7 +5608,7 @@
       </p:grpSpPr>
       <p:sp>
         <p:nvSpPr>
-          <p:cNvPr id="2017103420" name="Title 1"/>
+          <p:cNvPr id="1266078357" name="Title 1"/>
           <p:cNvSpPr>
             <a:spLocks noGrp="1"/>
           </p:cNvSpPr>
@@ -5646,7 +5646,7 @@
       </p:sp>
       <p:sp>
         <p:nvSpPr>
-          <p:cNvPr id="450379568" name="Content Placeholder 2"/>
+          <p:cNvPr id="883436515" name="Content Placeholder 2"/>
           <p:cNvSpPr>
             <a:spLocks noGrp="1"/>
           </p:cNvSpPr>
@@ -5875,7 +5875,7 @@
       </p:grpSpPr>
       <p:sp>
         <p:nvSpPr>
-          <p:cNvPr id="1430908663" name="Title 1"/>
+          <p:cNvPr id="1234679283" name="Title 1"/>
           <p:cNvSpPr>
             <a:spLocks noGrp="1"/>
           </p:cNvSpPr>
@@ -5899,7 +5899,7 @@
       </p:sp>
       <p:sp>
         <p:nvSpPr>
-          <p:cNvPr id="2145514881" name="Content Placeholder 2"/>
+          <p:cNvPr id="1912272539" name="Content Placeholder 2"/>
           <p:cNvSpPr>
             <a:spLocks noGrp="1"/>
           </p:cNvSpPr>
@@ -6044,7 +6044,7 @@
       </p:sp>
       <p:pic>
         <p:nvPicPr>
-          <p:cNvPr id="1441194421" name=""/>
+          <p:cNvPr id="504355123" name=""/>
           <p:cNvPicPr>
             <a:picLocks noChangeAspect="1"/>
           </p:cNvPicPr>
@@ -6066,7 +6066,7 @@
       </p:pic>
       <p:pic>
         <p:nvPicPr>
-          <p:cNvPr id="1012940725" name=""/>
+          <p:cNvPr id="578269824" name=""/>
           <p:cNvPicPr>
             <a:picLocks noChangeAspect="1"/>
           </p:cNvPicPr>
@@ -6088,7 +6088,7 @@
       </p:pic>
       <p:pic>
         <p:nvPicPr>
-          <p:cNvPr id="525383448" name=""/>
+          <p:cNvPr id="1741583864" name=""/>
           <p:cNvPicPr>
             <a:picLocks noChangeAspect="1"/>
           </p:cNvPicPr>
@@ -6144,7 +6144,7 @@
       </p:grpSpPr>
       <p:sp>
         <p:nvSpPr>
-          <p:cNvPr id="1524325714" name="Title 1"/>
+          <p:cNvPr id="2056159999" name="Title 1"/>
           <p:cNvSpPr>
             <a:spLocks noGrp="1"/>
           </p:cNvSpPr>
@@ -6155,7 +6155,7 @@
         <p:spPr bwMode="auto">
           <a:xfrm flipH="0" flipV="0">
             <a:off x="609599" y="274638"/>
-            <a:ext cx="10972800" cy="244906"/>
+            <a:ext cx="10972800" cy="244905"/>
           </a:xfrm>
         </p:spPr>
         <p:txBody>
@@ -6173,7 +6173,7 @@
       </p:sp>
       <p:sp>
         <p:nvSpPr>
-          <p:cNvPr id="133486726" name="Content Placeholder 2"/>
+          <p:cNvPr id="457255515" name="Content Placeholder 2"/>
           <p:cNvSpPr>
             <a:spLocks noGrp="1"/>
           </p:cNvSpPr>
@@ -6493,7 +6493,7 @@
       </p:grpSpPr>
       <p:sp>
         <p:nvSpPr>
-          <p:cNvPr id="235533648" name="Title 1"/>
+          <p:cNvPr id="605964312" name="Title 1"/>
           <p:cNvSpPr>
             <a:spLocks noGrp="1"/>
           </p:cNvSpPr>
@@ -6522,7 +6522,7 @@
       </p:sp>
       <p:sp>
         <p:nvSpPr>
-          <p:cNvPr id="1537236911" name="Content Placeholder 2"/>
+          <p:cNvPr id="1909460751" name="Content Placeholder 2"/>
           <p:cNvSpPr>
             <a:spLocks noGrp="1"/>
           </p:cNvSpPr>
@@ -6889,7 +6889,7 @@
       </p:grpSpPr>
       <p:sp>
         <p:nvSpPr>
-          <p:cNvPr id="1852407491" name="Title 1"/>
+          <p:cNvPr id="88024528" name="Title 1"/>
           <p:cNvSpPr>
             <a:spLocks noGrp="1"/>
           </p:cNvSpPr>
@@ -6927,7 +6927,7 @@
       </p:sp>
       <p:sp>
         <p:nvSpPr>
-          <p:cNvPr id="1524413339" name="Content Placeholder 2"/>
+          <p:cNvPr id="333774035" name="Content Placeholder 2"/>
           <p:cNvSpPr>
             <a:spLocks noGrp="1"/>
           </p:cNvSpPr>
@@ -6938,7 +6938,7 @@
         <p:spPr bwMode="auto">
           <a:xfrm flipH="0" flipV="0">
             <a:off x="609599" y="1417638"/>
-            <a:ext cx="10972800" cy="5084616"/>
+            <a:ext cx="10972800" cy="5084615"/>
           </a:xfrm>
         </p:spPr>
         <p:txBody>
@@ -7260,7 +7260,7 @@
       </p:grpSpPr>
       <p:sp>
         <p:nvSpPr>
-          <p:cNvPr id="1483072815" name="Title 1"/>
+          <p:cNvPr id="962661583" name="Title 1"/>
           <p:cNvSpPr>
             <a:spLocks noGrp="1"/>
           </p:cNvSpPr>
@@ -7294,7 +7294,7 @@
       </p:sp>
       <p:sp>
         <p:nvSpPr>
-          <p:cNvPr id="1687515657" name="Content Placeholder 2"/>
+          <p:cNvPr id="374895368" name="Content Placeholder 2"/>
           <p:cNvSpPr>
             <a:spLocks noGrp="1"/>
           </p:cNvSpPr>
@@ -7363,7 +7363,51 @@
                 <a:ea typeface="Ariel"/>
                 <a:cs typeface="Ariel"/>
               </a:rPr>
-              <a:t>Сайт “Химия и жизнь” – статья “Коррозия: бороться или управлять?” (</a:t>
+              <a:t>Сайт “</a:t>
+            </a:r>
+            <a:r>
+              <a:rPr lang="ru-RU" sz="2800" b="0" i="0" u="none">
+                <a:solidFill>
+                  <a:srgbClr val="000000"/>
+                </a:solidFill>
+                <a:latin typeface="Ariel"/>
+                <a:ea typeface="Ariel"/>
+                <a:cs typeface="Ariel"/>
+              </a:rPr>
+              <a:t>Наука</a:t>
+            </a:r>
+            <a:r>
+              <a:rPr sz="2800" b="0" i="0" u="none">
+                <a:solidFill>
+                  <a:srgbClr val="000000"/>
+                </a:solidFill>
+                <a:latin typeface="Ariel"/>
+                <a:ea typeface="Ariel"/>
+                <a:cs typeface="Ariel"/>
+              </a:rPr>
+              <a:t> и жизнь” – статья “Коррозия</a:t>
+            </a:r>
+            <a:r>
+              <a:rPr lang="ru-RU" sz="2800" b="0" i="0" u="none">
+                <a:solidFill>
+                  <a:srgbClr val="000000"/>
+                </a:solidFill>
+                <a:latin typeface="Ariel"/>
+                <a:ea typeface="Ariel"/>
+                <a:cs typeface="Ariel"/>
+              </a:rPr>
+              <a:t> или жизнь</a:t>
+            </a:r>
+            <a:r>
+              <a:rPr sz="2800" b="0" i="0" u="none">
+                <a:solidFill>
+                  <a:srgbClr val="000000"/>
+                </a:solidFill>
+                <a:latin typeface="Ariel"/>
+                <a:ea typeface="Ariel"/>
+                <a:cs typeface="Ariel"/>
+              </a:rPr>
+              <a:t>?” (</a:t>
             </a:r>
             <a:r>
               <a:rPr sz="2800" b="0" i="0" u="sng">
@@ -7392,6 +7436,28 @@
           </a:p>
         </p:txBody>
       </p:sp>
+      <p:pic>
+        <p:nvPicPr>
+          <p:cNvPr id="1070055669" name=""/>
+          <p:cNvPicPr>
+            <a:picLocks noChangeAspect="1"/>
+          </p:cNvPicPr>
+          <p:nvPr/>
+        </p:nvPicPr>
+        <p:blipFill rotWithShape="1">
+          <a:blip r:embed="rId4"/>
+          <a:stretch/>
+        </p:blipFill>
+        <p:spPr bwMode="auto">
+          <a:xfrm flipH="0" flipV="0">
+            <a:off x="9717591" y="4329545"/>
+            <a:ext cx="2543680" cy="2526722"/>
+          </a:xfrm>
+          <a:prstGeom prst="rect">
+            <a:avLst/>
+          </a:prstGeom>
+        </p:spPr>
+      </p:pic>
     </p:spTree>
   </p:cSld>
   <p:clrMapOvr>

--- a/67.pptx
+++ b/67.pptx
@@ -141,7 +141,7 @@
       </p:grpSpPr>
       <p:sp>
         <p:nvSpPr>
-          <p:cNvPr id="1641239491" name="Header Placeholder 1"/>
+          <p:cNvPr id="1765223367" name="Header Placeholder 1"/>
           <p:cNvSpPr>
             <a:spLocks noGrp="1"/>
           </p:cNvSpPr>
@@ -175,7 +175,7 @@
       </p:sp>
       <p:sp>
         <p:nvSpPr>
-          <p:cNvPr id="954565675" name="Date Placeholder 2"/>
+          <p:cNvPr id="863512624" name="Date Placeholder 2"/>
           <p:cNvSpPr>
             <a:spLocks noGrp="1"/>
           </p:cNvSpPr>
@@ -213,7 +213,7 @@
       </p:sp>
       <p:sp>
         <p:nvSpPr>
-          <p:cNvPr id="1196154312" name="Slide Image Placeholder 3"/>
+          <p:cNvPr id="1719444076" name="Slide Image Placeholder 3"/>
           <p:cNvSpPr>
             <a:spLocks noChangeAspect="1" noGrp="1" noRot="1"/>
           </p:cNvSpPr>
@@ -249,7 +249,7 @@
       </p:sp>
       <p:sp>
         <p:nvSpPr>
-          <p:cNvPr id="1973001305" name="Notes Placeholder 4"/>
+          <p:cNvPr id="657215619" name="Notes Placeholder 4"/>
           <p:cNvSpPr>
             <a:spLocks noGrp="1"/>
           </p:cNvSpPr>
@@ -323,7 +323,7 @@
       </p:sp>
       <p:sp>
         <p:nvSpPr>
-          <p:cNvPr id="1568470620" name="Footer Placeholder 5"/>
+          <p:cNvPr id="1068930465" name="Footer Placeholder 5"/>
           <p:cNvSpPr>
             <a:spLocks noGrp="1"/>
           </p:cNvSpPr>
@@ -357,7 +357,7 @@
       </p:sp>
       <p:sp>
         <p:nvSpPr>
-          <p:cNvPr id="922381865" name="Slide Number Placeholder 6"/>
+          <p:cNvPr id="142757552" name="Slide Number Placeholder 6"/>
           <p:cNvSpPr>
             <a:spLocks noGrp="1"/>
           </p:cNvSpPr>
@@ -510,7 +510,7 @@
       </p:grpSpPr>
       <p:sp>
         <p:nvSpPr>
-          <p:cNvPr id="699977956" name="Slide Image Placeholder 1"/>
+          <p:cNvPr id="1963295560" name="Slide Image Placeholder 1"/>
           <p:cNvSpPr>
             <a:spLocks noChangeAspect="1" noGrp="1" noRot="1"/>
           </p:cNvSpPr>
@@ -527,7 +527,7 @@
       </p:sp>
       <p:sp>
         <p:nvSpPr>
-          <p:cNvPr id="1998286611" name="Notes Placeholder 2"/>
+          <p:cNvPr id="243883146" name="Notes Placeholder 2"/>
           <p:cNvSpPr>
             <a:spLocks noGrp="1"/>
           </p:cNvSpPr>
@@ -552,7 +552,7 @@
       </p:sp>
       <p:sp>
         <p:nvSpPr>
-          <p:cNvPr id="1189683453" name="Slide Number Placeholder 3"/>
+          <p:cNvPr id="1826053912" name="Slide Number Placeholder 3"/>
           <p:cNvSpPr>
             <a:spLocks noGrp="1"/>
           </p:cNvSpPr>
@@ -603,7 +603,7 @@
       </p:grpSpPr>
       <p:sp>
         <p:nvSpPr>
-          <p:cNvPr id="725786711" name="Slide Image Placeholder 1"/>
+          <p:cNvPr id="1338483498" name="Slide Image Placeholder 1"/>
           <p:cNvSpPr>
             <a:spLocks noChangeAspect="1" noGrp="1" noRot="1"/>
           </p:cNvSpPr>
@@ -615,7 +615,7 @@
       </p:sp>
       <p:sp>
         <p:nvSpPr>
-          <p:cNvPr id="337901232" name="Notes Placeholder 2"/>
+          <p:cNvPr id="1492585980" name="Notes Placeholder 2"/>
           <p:cNvSpPr>
             <a:spLocks noGrp="1"/>
           </p:cNvSpPr>
@@ -637,7 +637,7 @@
       </p:sp>
       <p:sp>
         <p:nvSpPr>
-          <p:cNvPr id="269292706" name="Slide Number Placeholder 3"/>
+          <p:cNvPr id="929389940" name="Slide Number Placeholder 3"/>
           <p:cNvSpPr>
             <a:spLocks noGrp="1"/>
           </p:cNvSpPr>
@@ -688,7 +688,7 @@
       </p:grpSpPr>
       <p:sp>
         <p:nvSpPr>
-          <p:cNvPr id="1852748268" name="Slide Image Placeholder 1"/>
+          <p:cNvPr id="1667655810" name="Slide Image Placeholder 1"/>
           <p:cNvSpPr>
             <a:spLocks noChangeAspect="1" noGrp="1" noRot="1"/>
           </p:cNvSpPr>
@@ -700,7 +700,7 @@
       </p:sp>
       <p:sp>
         <p:nvSpPr>
-          <p:cNvPr id="1357174657" name="Notes Placeholder 2"/>
+          <p:cNvPr id="511575995" name="Notes Placeholder 2"/>
           <p:cNvSpPr>
             <a:spLocks noGrp="1"/>
           </p:cNvSpPr>
@@ -722,7 +722,7 @@
       </p:sp>
       <p:sp>
         <p:nvSpPr>
-          <p:cNvPr id="1087728446" name="Slide Number Placeholder 3"/>
+          <p:cNvPr id="993051986" name="Slide Number Placeholder 3"/>
           <p:cNvSpPr>
             <a:spLocks noGrp="1"/>
           </p:cNvSpPr>
@@ -773,7 +773,7 @@
       </p:grpSpPr>
       <p:sp>
         <p:nvSpPr>
-          <p:cNvPr id="1724582075" name="Slide Image Placeholder 1"/>
+          <p:cNvPr id="1088721886" name="Slide Image Placeholder 1"/>
           <p:cNvSpPr>
             <a:spLocks noChangeAspect="1" noGrp="1" noRot="1"/>
           </p:cNvSpPr>
@@ -785,7 +785,7 @@
       </p:sp>
       <p:sp>
         <p:nvSpPr>
-          <p:cNvPr id="126192588" name="Notes Placeholder 2"/>
+          <p:cNvPr id="432920258" name="Notes Placeholder 2"/>
           <p:cNvSpPr>
             <a:spLocks noGrp="1"/>
           </p:cNvSpPr>
@@ -807,7 +807,7 @@
       </p:sp>
       <p:sp>
         <p:nvSpPr>
-          <p:cNvPr id="1314039635" name="Slide Number Placeholder 3"/>
+          <p:cNvPr id="2089287141" name="Slide Number Placeholder 3"/>
           <p:cNvSpPr>
             <a:spLocks noGrp="1"/>
           </p:cNvSpPr>
@@ -858,7 +858,7 @@
       </p:grpSpPr>
       <p:sp>
         <p:nvSpPr>
-          <p:cNvPr id="1190502552" name="Slide Image Placeholder 1"/>
+          <p:cNvPr id="1288828358" name="Slide Image Placeholder 1"/>
           <p:cNvSpPr>
             <a:spLocks noChangeAspect="1" noGrp="1" noRot="1"/>
           </p:cNvSpPr>
@@ -870,7 +870,7 @@
       </p:sp>
       <p:sp>
         <p:nvSpPr>
-          <p:cNvPr id="38140062" name="Notes Placeholder 2"/>
+          <p:cNvPr id="678130745" name="Notes Placeholder 2"/>
           <p:cNvSpPr>
             <a:spLocks noGrp="1"/>
           </p:cNvSpPr>
@@ -892,7 +892,7 @@
       </p:sp>
       <p:sp>
         <p:nvSpPr>
-          <p:cNvPr id="791768141" name="Slide Number Placeholder 3"/>
+          <p:cNvPr id="2067556337" name="Slide Number Placeholder 3"/>
           <p:cNvSpPr>
             <a:spLocks noGrp="1"/>
           </p:cNvSpPr>
@@ -943,7 +943,7 @@
       </p:grpSpPr>
       <p:sp>
         <p:nvSpPr>
-          <p:cNvPr id="1390815669" name="Slide Image Placeholder 1"/>
+          <p:cNvPr id="11276740" name="Slide Image Placeholder 1"/>
           <p:cNvSpPr>
             <a:spLocks noChangeAspect="1" noGrp="1" noRot="1"/>
           </p:cNvSpPr>
@@ -955,7 +955,7 @@
       </p:sp>
       <p:sp>
         <p:nvSpPr>
-          <p:cNvPr id="1800811085" name="Notes Placeholder 2"/>
+          <p:cNvPr id="1318968533" name="Notes Placeholder 2"/>
           <p:cNvSpPr>
             <a:spLocks noGrp="1"/>
           </p:cNvSpPr>
@@ -977,7 +977,7 @@
       </p:sp>
       <p:sp>
         <p:nvSpPr>
-          <p:cNvPr id="1309133581" name="Slide Number Placeholder 3"/>
+          <p:cNvPr id="1912470324" name="Slide Number Placeholder 3"/>
           <p:cNvSpPr>
             <a:spLocks noGrp="1"/>
           </p:cNvSpPr>
@@ -1028,7 +1028,7 @@
       </p:grpSpPr>
       <p:sp>
         <p:nvSpPr>
-          <p:cNvPr id="517422749" name="Slide Image Placeholder 1"/>
+          <p:cNvPr id="581576077" name="Slide Image Placeholder 1"/>
           <p:cNvSpPr>
             <a:spLocks noChangeAspect="1" noGrp="1" noRot="1"/>
           </p:cNvSpPr>
@@ -1040,7 +1040,7 @@
       </p:sp>
       <p:sp>
         <p:nvSpPr>
-          <p:cNvPr id="868911826" name="Notes Placeholder 2"/>
+          <p:cNvPr id="65066192" name="Notes Placeholder 2"/>
           <p:cNvSpPr>
             <a:spLocks noGrp="1"/>
           </p:cNvSpPr>
@@ -1062,7 +1062,7 @@
       </p:sp>
       <p:sp>
         <p:nvSpPr>
-          <p:cNvPr id="1242367423" name="Slide Number Placeholder 3"/>
+          <p:cNvPr id="743959087" name="Slide Number Placeholder 3"/>
           <p:cNvSpPr>
             <a:spLocks noGrp="1"/>
           </p:cNvSpPr>
@@ -1113,7 +1113,7 @@
       </p:grpSpPr>
       <p:sp>
         <p:nvSpPr>
-          <p:cNvPr id="805387009" name="Slide Image Placeholder 1"/>
+          <p:cNvPr id="226954533" name="Slide Image Placeholder 1"/>
           <p:cNvSpPr>
             <a:spLocks noChangeAspect="1" noGrp="1" noRot="1"/>
           </p:cNvSpPr>
@@ -1125,7 +1125,7 @@
       </p:sp>
       <p:sp>
         <p:nvSpPr>
-          <p:cNvPr id="150416866" name="Notes Placeholder 2"/>
+          <p:cNvPr id="909077889" name="Notes Placeholder 2"/>
           <p:cNvSpPr>
             <a:spLocks noGrp="1"/>
           </p:cNvSpPr>
@@ -1147,7 +1147,7 @@
       </p:sp>
       <p:sp>
         <p:nvSpPr>
-          <p:cNvPr id="595954868" name="Slide Number Placeholder 3"/>
+          <p:cNvPr id="634540513" name="Slide Number Placeholder 3"/>
           <p:cNvSpPr>
             <a:spLocks noGrp="1"/>
           </p:cNvSpPr>
@@ -1198,7 +1198,7 @@
       </p:grpSpPr>
       <p:sp>
         <p:nvSpPr>
-          <p:cNvPr id="2100050992" name="Shape 1059"/>
+          <p:cNvPr id="1662078300" name="Shape 1059"/>
           <p:cNvSpPr>
             <a:spLocks noChangeArrowheads="1" noGrp="1"/>
           </p:cNvSpPr>
@@ -1321,7 +1321,7 @@
       </p:sp>
       <p:sp>
         <p:nvSpPr>
-          <p:cNvPr id="477092650" name="Shape 1060"/>
+          <p:cNvPr id="236755867" name="Shape 1060"/>
           <p:cNvSpPr>
             <a:spLocks noChangeArrowheads="1" noGrp="1"/>
           </p:cNvSpPr>
@@ -1412,7 +1412,7 @@
       </p:sp>
       <p:sp>
         <p:nvSpPr>
-          <p:cNvPr id="1715425063" name="Shape 1061"/>
+          <p:cNvPr id="317609159" name="Shape 1061"/>
           <p:cNvSpPr>
             <a:spLocks noChangeArrowheads="1" noGrp="1"/>
           </p:cNvSpPr>
@@ -1498,7 +1498,7 @@
       </p:sp>
       <p:sp>
         <p:nvSpPr>
-          <p:cNvPr id="1242758269" name="Shape 1062"/>
+          <p:cNvPr id="1218498074" name="Shape 1062"/>
           <p:cNvSpPr>
             <a:spLocks noChangeArrowheads="1" noGrp="1"/>
           </p:cNvSpPr>
@@ -1576,7 +1576,7 @@
       </p:sp>
       <p:sp>
         <p:nvSpPr>
-          <p:cNvPr id="77059856" name="Shape 1063"/>
+          <p:cNvPr id="420464751" name="Shape 1063"/>
           <p:cNvSpPr>
             <a:spLocks noChangeArrowheads="1" noGrp="1"/>
           </p:cNvSpPr>
@@ -1654,7 +1654,7 @@
       </p:sp>
       <p:sp>
         <p:nvSpPr>
-          <p:cNvPr id="925381226" name="Subtitle 2"/>
+          <p:cNvPr id="1869534580" name="Subtitle 2"/>
           <p:cNvSpPr>
             <a:spLocks noGrp="1"/>
           </p:cNvSpPr>
@@ -1777,7 +1777,7 @@
       </p:sp>
       <p:sp>
         <p:nvSpPr>
-          <p:cNvPr id="344710206" name="Date Placeholder 3"/>
+          <p:cNvPr id="1471713591" name="Date Placeholder 3"/>
           <p:cNvSpPr>
             <a:spLocks noGrp="1"/>
           </p:cNvSpPr>
@@ -1803,7 +1803,7 @@
       </p:sp>
       <p:sp>
         <p:nvSpPr>
-          <p:cNvPr id="268041474" name="Footer Placeholder 4"/>
+          <p:cNvPr id="1645756808" name="Footer Placeholder 4"/>
           <p:cNvSpPr>
             <a:spLocks noGrp="1"/>
           </p:cNvSpPr>
@@ -1825,7 +1825,7 @@
       </p:sp>
       <p:sp>
         <p:nvSpPr>
-          <p:cNvPr id="2090864370" name="Slide Number Placeholder 5"/>
+          <p:cNvPr id="374140396" name="Slide Number Placeholder 5"/>
           <p:cNvSpPr>
             <a:spLocks noGrp="1"/>
           </p:cNvSpPr>
@@ -1851,7 +1851,7 @@
       </p:sp>
       <p:sp>
         <p:nvSpPr>
-          <p:cNvPr id="841860465" name="Title 6"/>
+          <p:cNvPr id="4342817" name="Title 6"/>
           <p:cNvSpPr>
             <a:spLocks noGrp="1"/>
           </p:cNvSpPr>
@@ -1911,7 +1911,7 @@
       </p:grpSpPr>
       <p:sp>
         <p:nvSpPr>
-          <p:cNvPr id="1079378486" name="Title 1"/>
+          <p:cNvPr id="787421461" name="Title 1"/>
           <p:cNvSpPr>
             <a:spLocks noGrp="1"/>
           </p:cNvSpPr>
@@ -1937,7 +1937,7 @@
       </p:sp>
       <p:sp>
         <p:nvSpPr>
-          <p:cNvPr id="1296384963" name="Vertical Text Placeholder 2"/>
+          <p:cNvPr id="969826794" name="Vertical Text Placeholder 2"/>
           <p:cNvSpPr>
             <a:spLocks noGrp="1"/>
           </p:cNvSpPr>
@@ -2003,7 +2003,7 @@
       </p:sp>
       <p:sp>
         <p:nvSpPr>
-          <p:cNvPr id="813786314" name="Date Placeholder 3"/>
+          <p:cNvPr id="255181846" name="Date Placeholder 3"/>
           <p:cNvSpPr>
             <a:spLocks noGrp="1"/>
           </p:cNvSpPr>
@@ -2029,7 +2029,7 @@
       </p:sp>
       <p:sp>
         <p:nvSpPr>
-          <p:cNvPr id="703941209" name="Footer Placeholder 4"/>
+          <p:cNvPr id="2048890852" name="Footer Placeholder 4"/>
           <p:cNvSpPr>
             <a:spLocks noGrp="1"/>
           </p:cNvSpPr>
@@ -2051,7 +2051,7 @@
       </p:sp>
       <p:sp>
         <p:nvSpPr>
-          <p:cNvPr id="1560240397" name="Slide Number Placeholder 5"/>
+          <p:cNvPr id="962426568" name="Slide Number Placeholder 5"/>
           <p:cNvSpPr>
             <a:spLocks noGrp="1"/>
           </p:cNvSpPr>
@@ -2102,7 +2102,7 @@
       </p:grpSpPr>
       <p:sp>
         <p:nvSpPr>
-          <p:cNvPr id="1592538602" name="Vertical Title 1"/>
+          <p:cNvPr id="143368611" name="Vertical Title 1"/>
           <p:cNvSpPr>
             <a:spLocks noGrp="1"/>
           </p:cNvSpPr>
@@ -2137,7 +2137,7 @@
       </p:sp>
       <p:sp>
         <p:nvSpPr>
-          <p:cNvPr id="1400771874" name="Vertical Text Placeholder 2"/>
+          <p:cNvPr id="853850961" name="Vertical Text Placeholder 2"/>
           <p:cNvSpPr>
             <a:spLocks noGrp="1"/>
           </p:cNvSpPr>
@@ -2208,7 +2208,7 @@
       </p:sp>
       <p:sp>
         <p:nvSpPr>
-          <p:cNvPr id="199097420" name="Date Placeholder 3"/>
+          <p:cNvPr id="845168924" name="Date Placeholder 3"/>
           <p:cNvSpPr>
             <a:spLocks noGrp="1"/>
           </p:cNvSpPr>
@@ -2234,7 +2234,7 @@
       </p:sp>
       <p:sp>
         <p:nvSpPr>
-          <p:cNvPr id="823908414" name="Footer Placeholder 4"/>
+          <p:cNvPr id="1805732183" name="Footer Placeholder 4"/>
           <p:cNvSpPr>
             <a:spLocks noGrp="1"/>
           </p:cNvSpPr>
@@ -2256,7 +2256,7 @@
       </p:sp>
       <p:sp>
         <p:nvSpPr>
-          <p:cNvPr id="828831871" name="Slide Number Placeholder 5"/>
+          <p:cNvPr id="785922455" name="Slide Number Placeholder 5"/>
           <p:cNvSpPr>
             <a:spLocks noGrp="1"/>
           </p:cNvSpPr>
@@ -2307,7 +2307,7 @@
       </p:grpSpPr>
       <p:sp>
         <p:nvSpPr>
-          <p:cNvPr id="504401428" name="Title 1"/>
+          <p:cNvPr id="1701807027" name="Title 1"/>
           <p:cNvSpPr>
             <a:spLocks noGrp="1"/>
           </p:cNvSpPr>
@@ -2333,7 +2333,7 @@
       </p:sp>
       <p:sp>
         <p:nvSpPr>
-          <p:cNvPr id="99607868" name="Content Placeholder 2"/>
+          <p:cNvPr id="947637378" name="Content Placeholder 2"/>
           <p:cNvSpPr>
             <a:spLocks noGrp="1"/>
           </p:cNvSpPr>
@@ -2399,7 +2399,7 @@
       </p:sp>
       <p:sp>
         <p:nvSpPr>
-          <p:cNvPr id="2009377059" name="Date Placeholder 3"/>
+          <p:cNvPr id="1409864628" name="Date Placeholder 3"/>
           <p:cNvSpPr>
             <a:spLocks noGrp="1"/>
           </p:cNvSpPr>
@@ -2425,7 +2425,7 @@
       </p:sp>
       <p:sp>
         <p:nvSpPr>
-          <p:cNvPr id="1702959065" name="Footer Placeholder 4"/>
+          <p:cNvPr id="2010847840" name="Footer Placeholder 4"/>
           <p:cNvSpPr>
             <a:spLocks noGrp="1"/>
           </p:cNvSpPr>
@@ -2447,7 +2447,7 @@
       </p:sp>
       <p:sp>
         <p:nvSpPr>
-          <p:cNvPr id="879856845" name="Slide Number Placeholder 5"/>
+          <p:cNvPr id="360890471" name="Slide Number Placeholder 5"/>
           <p:cNvSpPr>
             <a:spLocks noGrp="1"/>
           </p:cNvSpPr>
@@ -2498,7 +2498,7 @@
       </p:grpSpPr>
       <p:sp>
         <p:nvSpPr>
-          <p:cNvPr id="1535263426" name="Title 1"/>
+          <p:cNvPr id="765276733" name="Title 1"/>
           <p:cNvSpPr>
             <a:spLocks noGrp="1"/>
           </p:cNvSpPr>
@@ -2533,7 +2533,7 @@
       </p:sp>
       <p:sp>
         <p:nvSpPr>
-          <p:cNvPr id="765218938" name="Text Placeholder 2"/>
+          <p:cNvPr id="120677149" name="Text Placeholder 2"/>
           <p:cNvSpPr>
             <a:spLocks noGrp="1"/>
           </p:cNvSpPr>
@@ -2655,7 +2655,7 @@
       </p:sp>
       <p:sp>
         <p:nvSpPr>
-          <p:cNvPr id="1409206797" name="Date Placeholder 3"/>
+          <p:cNvPr id="1988076420" name="Date Placeholder 3"/>
           <p:cNvSpPr>
             <a:spLocks noGrp="1"/>
           </p:cNvSpPr>
@@ -2681,7 +2681,7 @@
       </p:sp>
       <p:sp>
         <p:nvSpPr>
-          <p:cNvPr id="985409631" name="Footer Placeholder 4"/>
+          <p:cNvPr id="2089943246" name="Footer Placeholder 4"/>
           <p:cNvSpPr>
             <a:spLocks noGrp="1"/>
           </p:cNvSpPr>
@@ -2703,7 +2703,7 @@
       </p:sp>
       <p:sp>
         <p:nvSpPr>
-          <p:cNvPr id="230801103" name="Slide Number Placeholder 5"/>
+          <p:cNvPr id="910461234" name="Slide Number Placeholder 5"/>
           <p:cNvSpPr>
             <a:spLocks noGrp="1"/>
           </p:cNvSpPr>
@@ -2754,7 +2754,7 @@
       </p:grpSpPr>
       <p:sp>
         <p:nvSpPr>
-          <p:cNvPr id="568005471" name="Title 1"/>
+          <p:cNvPr id="682316441" name="Title 1"/>
           <p:cNvSpPr>
             <a:spLocks noGrp="1"/>
           </p:cNvSpPr>
@@ -2780,7 +2780,7 @@
       </p:sp>
       <p:sp>
         <p:nvSpPr>
-          <p:cNvPr id="972165729" name="Content Placeholder 2"/>
+          <p:cNvPr id="1455245333" name="Content Placeholder 2"/>
           <p:cNvSpPr>
             <a:spLocks noGrp="1"/>
           </p:cNvSpPr>
@@ -2879,7 +2879,7 @@
       </p:sp>
       <p:sp>
         <p:nvSpPr>
-          <p:cNvPr id="1747858669" name="Content Placeholder 3"/>
+          <p:cNvPr id="33962568" name="Content Placeholder 3"/>
           <p:cNvSpPr>
             <a:spLocks noGrp="1"/>
           </p:cNvSpPr>
@@ -2978,7 +2978,7 @@
       </p:sp>
       <p:sp>
         <p:nvSpPr>
-          <p:cNvPr id="1816110471" name="Date Placeholder 4"/>
+          <p:cNvPr id="212973579" name="Date Placeholder 4"/>
           <p:cNvSpPr>
             <a:spLocks noGrp="1"/>
           </p:cNvSpPr>
@@ -3004,7 +3004,7 @@
       </p:sp>
       <p:sp>
         <p:nvSpPr>
-          <p:cNvPr id="1206403655" name="Footer Placeholder 5"/>
+          <p:cNvPr id="518533726" name="Footer Placeholder 5"/>
           <p:cNvSpPr>
             <a:spLocks noGrp="1"/>
           </p:cNvSpPr>
@@ -3026,7 +3026,7 @@
       </p:sp>
       <p:sp>
         <p:nvSpPr>
-          <p:cNvPr id="1007129099" name="Slide Number Placeholder 6"/>
+          <p:cNvPr id="1772796036" name="Slide Number Placeholder 6"/>
           <p:cNvSpPr>
             <a:spLocks noGrp="1"/>
           </p:cNvSpPr>
@@ -3077,7 +3077,7 @@
       </p:grpSpPr>
       <p:sp>
         <p:nvSpPr>
-          <p:cNvPr id="888148875" name="Title 1"/>
+          <p:cNvPr id="1596659529" name="Title 1"/>
           <p:cNvSpPr>
             <a:spLocks noGrp="1"/>
           </p:cNvSpPr>
@@ -3107,7 +3107,7 @@
       </p:sp>
       <p:sp>
         <p:nvSpPr>
-          <p:cNvPr id="1824995368" name="Text Placeholder 2"/>
+          <p:cNvPr id="1801310162" name="Text Placeholder 2"/>
           <p:cNvSpPr>
             <a:spLocks noGrp="1"/>
           </p:cNvSpPr>
@@ -3175,7 +3175,7 @@
       </p:sp>
       <p:sp>
         <p:nvSpPr>
-          <p:cNvPr id="1111730279" name="Content Placeholder 3"/>
+          <p:cNvPr id="543620014" name="Content Placeholder 3"/>
           <p:cNvSpPr>
             <a:spLocks noGrp="1"/>
           </p:cNvSpPr>
@@ -3274,7 +3274,7 @@
       </p:sp>
       <p:sp>
         <p:nvSpPr>
-          <p:cNvPr id="58167049" name="Text Placeholder 4"/>
+          <p:cNvPr id="367086399" name="Text Placeholder 4"/>
           <p:cNvSpPr>
             <a:spLocks noGrp="1"/>
           </p:cNvSpPr>
@@ -3342,7 +3342,7 @@
       </p:sp>
       <p:sp>
         <p:nvSpPr>
-          <p:cNvPr id="2102293969" name="Content Placeholder 5"/>
+          <p:cNvPr id="760848701" name="Content Placeholder 5"/>
           <p:cNvSpPr>
             <a:spLocks noGrp="1"/>
           </p:cNvSpPr>
@@ -3441,7 +3441,7 @@
       </p:sp>
       <p:sp>
         <p:nvSpPr>
-          <p:cNvPr id="1055374968" name="Date Placeholder 6"/>
+          <p:cNvPr id="656996242" name="Date Placeholder 6"/>
           <p:cNvSpPr>
             <a:spLocks noGrp="1"/>
           </p:cNvSpPr>
@@ -3467,7 +3467,7 @@
       </p:sp>
       <p:sp>
         <p:nvSpPr>
-          <p:cNvPr id="611502448" name="Footer Placeholder 7"/>
+          <p:cNvPr id="1282944205" name="Footer Placeholder 7"/>
           <p:cNvSpPr>
             <a:spLocks noGrp="1"/>
           </p:cNvSpPr>
@@ -3489,7 +3489,7 @@
       </p:sp>
       <p:sp>
         <p:nvSpPr>
-          <p:cNvPr id="1034476750" name="Slide Number Placeholder 8"/>
+          <p:cNvPr id="1384961501" name="Slide Number Placeholder 8"/>
           <p:cNvSpPr>
             <a:spLocks noGrp="1"/>
           </p:cNvSpPr>
@@ -3540,7 +3540,7 @@
       </p:grpSpPr>
       <p:sp>
         <p:nvSpPr>
-          <p:cNvPr id="777698473" name="Title 1"/>
+          <p:cNvPr id="310652807" name="Title 1"/>
           <p:cNvSpPr>
             <a:spLocks noGrp="1"/>
           </p:cNvSpPr>
@@ -3566,7 +3566,7 @@
       </p:sp>
       <p:sp>
         <p:nvSpPr>
-          <p:cNvPr id="1042919619" name="Date Placeholder 2"/>
+          <p:cNvPr id="968920780" name="Date Placeholder 2"/>
           <p:cNvSpPr>
             <a:spLocks noGrp="1"/>
           </p:cNvSpPr>
@@ -3592,7 +3592,7 @@
       </p:sp>
       <p:sp>
         <p:nvSpPr>
-          <p:cNvPr id="1564284824" name="Footer Placeholder 3"/>
+          <p:cNvPr id="239960509" name="Footer Placeholder 3"/>
           <p:cNvSpPr>
             <a:spLocks noGrp="1"/>
           </p:cNvSpPr>
@@ -3614,7 +3614,7 @@
       </p:sp>
       <p:sp>
         <p:nvSpPr>
-          <p:cNvPr id="1470099786" name="Slide Number Placeholder 4"/>
+          <p:cNvPr id="941855885" name="Slide Number Placeholder 4"/>
           <p:cNvSpPr>
             <a:spLocks noGrp="1"/>
           </p:cNvSpPr>
@@ -3665,7 +3665,7 @@
       </p:grpSpPr>
       <p:sp>
         <p:nvSpPr>
-          <p:cNvPr id="1156939109" name="Date Placeholder 1"/>
+          <p:cNvPr id="948512630" name="Date Placeholder 1"/>
           <p:cNvSpPr>
             <a:spLocks noGrp="1"/>
           </p:cNvSpPr>
@@ -3691,7 +3691,7 @@
       </p:sp>
       <p:sp>
         <p:nvSpPr>
-          <p:cNvPr id="1335371872" name="Footer Placeholder 2"/>
+          <p:cNvPr id="1482169710" name="Footer Placeholder 2"/>
           <p:cNvSpPr>
             <a:spLocks noGrp="1"/>
           </p:cNvSpPr>
@@ -3713,7 +3713,7 @@
       </p:sp>
       <p:sp>
         <p:nvSpPr>
-          <p:cNvPr id="1212802632" name="Slide Number Placeholder 3"/>
+          <p:cNvPr id="689267191" name="Slide Number Placeholder 3"/>
           <p:cNvSpPr>
             <a:spLocks noGrp="1"/>
           </p:cNvSpPr>
@@ -3764,7 +3764,7 @@
       </p:grpSpPr>
       <p:sp>
         <p:nvSpPr>
-          <p:cNvPr id="332789494" name="Title 1"/>
+          <p:cNvPr id="506767484" name="Title 1"/>
           <p:cNvSpPr>
             <a:spLocks noGrp="1"/>
           </p:cNvSpPr>
@@ -3799,7 +3799,7 @@
       </p:sp>
       <p:sp>
         <p:nvSpPr>
-          <p:cNvPr id="132428119" name="Content Placeholder 2"/>
+          <p:cNvPr id="1268856565" name="Content Placeholder 2"/>
           <p:cNvSpPr>
             <a:spLocks noGrp="1"/>
           </p:cNvSpPr>
@@ -3898,7 +3898,7 @@
       </p:sp>
       <p:sp>
         <p:nvSpPr>
-          <p:cNvPr id="1933668252" name="Text Placeholder 3"/>
+          <p:cNvPr id="1724808050" name="Text Placeholder 3"/>
           <p:cNvSpPr>
             <a:spLocks noGrp="1"/>
           </p:cNvSpPr>
@@ -3966,7 +3966,7 @@
       </p:sp>
       <p:sp>
         <p:nvSpPr>
-          <p:cNvPr id="245776299" name="Date Placeholder 4"/>
+          <p:cNvPr id="585536456" name="Date Placeholder 4"/>
           <p:cNvSpPr>
             <a:spLocks noGrp="1"/>
           </p:cNvSpPr>
@@ -3992,7 +3992,7 @@
       </p:sp>
       <p:sp>
         <p:nvSpPr>
-          <p:cNvPr id="2133755214" name="Footer Placeholder 5"/>
+          <p:cNvPr id="601013683" name="Footer Placeholder 5"/>
           <p:cNvSpPr>
             <a:spLocks noGrp="1"/>
           </p:cNvSpPr>
@@ -4014,7 +4014,7 @@
       </p:sp>
       <p:sp>
         <p:nvSpPr>
-          <p:cNvPr id="2080551175" name="Slide Number Placeholder 6"/>
+          <p:cNvPr id="117210388" name="Slide Number Placeholder 6"/>
           <p:cNvSpPr>
             <a:spLocks noGrp="1"/>
           </p:cNvSpPr>
@@ -4065,7 +4065,7 @@
       </p:grpSpPr>
       <p:sp>
         <p:nvSpPr>
-          <p:cNvPr id="1495438180" name="Title 1"/>
+          <p:cNvPr id="865671305" name="Title 1"/>
           <p:cNvSpPr>
             <a:spLocks noGrp="1"/>
           </p:cNvSpPr>
@@ -4100,7 +4100,7 @@
       </p:sp>
       <p:sp>
         <p:nvSpPr>
-          <p:cNvPr id="1740065644" name="Picture Placeholder 2"/>
+          <p:cNvPr id="985750188" name="Picture Placeholder 2"/>
           <p:cNvSpPr>
             <a:spLocks noGrp="1"/>
           </p:cNvSpPr>
@@ -4164,7 +4164,7 @@
       </p:sp>
       <p:sp>
         <p:nvSpPr>
-          <p:cNvPr id="1464992938" name="Text Placeholder 3"/>
+          <p:cNvPr id="806890810" name="Text Placeholder 3"/>
           <p:cNvSpPr>
             <a:spLocks noGrp="1"/>
           </p:cNvSpPr>
@@ -4232,7 +4232,7 @@
       </p:sp>
       <p:sp>
         <p:nvSpPr>
-          <p:cNvPr id="442259663" name="Date Placeholder 4"/>
+          <p:cNvPr id="1208604078" name="Date Placeholder 4"/>
           <p:cNvSpPr>
             <a:spLocks noGrp="1"/>
           </p:cNvSpPr>
@@ -4258,7 +4258,7 @@
       </p:sp>
       <p:sp>
         <p:nvSpPr>
-          <p:cNvPr id="912878615" name="Footer Placeholder 5"/>
+          <p:cNvPr id="2062690219" name="Footer Placeholder 5"/>
           <p:cNvSpPr>
             <a:spLocks noGrp="1"/>
           </p:cNvSpPr>
@@ -4280,7 +4280,7 @@
       </p:sp>
       <p:sp>
         <p:nvSpPr>
-          <p:cNvPr id="1145026640" name="Slide Number Placeholder 6"/>
+          <p:cNvPr id="466969656" name="Slide Number Placeholder 6"/>
           <p:cNvSpPr>
             <a:spLocks noGrp="1"/>
           </p:cNvSpPr>
@@ -4336,7 +4336,7 @@
       </p:grpSpPr>
       <p:sp>
         <p:nvSpPr>
-          <p:cNvPr id="190609668" name="Shape 1059"/>
+          <p:cNvPr id="338895946" name="Shape 1059"/>
           <p:cNvSpPr>
             <a:spLocks noChangeArrowheads="1" noGrp="1"/>
           </p:cNvSpPr>
@@ -4414,7 +4414,7 @@
       </p:sp>
       <p:sp>
         <p:nvSpPr>
-          <p:cNvPr id="918581379" name="Shape 1060"/>
+          <p:cNvPr id="1316141818" name="Shape 1060"/>
           <p:cNvSpPr>
             <a:spLocks noChangeArrowheads="1" noGrp="1"/>
           </p:cNvSpPr>
@@ -4495,7 +4495,7 @@
       </p:sp>
       <p:sp>
         <p:nvSpPr>
-          <p:cNvPr id="615026735" name="Shape 1061"/>
+          <p:cNvPr id="1331168153" name="Shape 1061"/>
           <p:cNvSpPr>
             <a:spLocks noChangeArrowheads="1" noGrp="1"/>
           </p:cNvSpPr>
@@ -4613,7 +4613,7 @@
       </p:sp>
       <p:sp>
         <p:nvSpPr>
-          <p:cNvPr id="1371959880" name="Title 1"/>
+          <p:cNvPr id="1332627722" name="Title 1"/>
           <p:cNvSpPr>
             <a:spLocks noGrp="1"/>
           </p:cNvSpPr>
@@ -4649,7 +4649,7 @@
       </p:sp>
       <p:sp>
         <p:nvSpPr>
-          <p:cNvPr id="818630471" name="Text Placeholder 2"/>
+          <p:cNvPr id="573990724" name="Text Placeholder 2"/>
           <p:cNvSpPr>
             <a:spLocks noGrp="1"/>
           </p:cNvSpPr>
@@ -4725,7 +4725,7 @@
       </p:sp>
       <p:sp>
         <p:nvSpPr>
-          <p:cNvPr id="283372904" name="Date Placeholder 3"/>
+          <p:cNvPr id="1645781529" name="Date Placeholder 3"/>
           <p:cNvSpPr>
             <a:spLocks noGrp="1"/>
           </p:cNvSpPr>
@@ -4769,7 +4769,7 @@
       </p:sp>
       <p:sp>
         <p:nvSpPr>
-          <p:cNvPr id="1484487980" name="Footer Placeholder 4"/>
+          <p:cNvPr id="2092484226" name="Footer Placeholder 4"/>
           <p:cNvSpPr>
             <a:spLocks noGrp="1"/>
           </p:cNvSpPr>
@@ -4809,7 +4809,7 @@
       </p:sp>
       <p:sp>
         <p:nvSpPr>
-          <p:cNvPr id="1579864256" name="Slide Number Placeholder 5"/>
+          <p:cNvPr id="1647735984" name="Slide Number Placeholder 5"/>
           <p:cNvSpPr>
             <a:spLocks noGrp="1"/>
           </p:cNvSpPr>
@@ -5158,7 +5158,7 @@
       </p:grpSpPr>
       <p:sp>
         <p:nvSpPr>
-          <p:cNvPr id="1009535222" name="Title 1"/>
+          <p:cNvPr id="1215288512" name="Title 1"/>
           <p:cNvSpPr>
             <a:spLocks noGrp="1"/>
           </p:cNvSpPr>
@@ -5245,7 +5245,7 @@
       </p:sp>
       <p:sp>
         <p:nvSpPr>
-          <p:cNvPr id="1596585459" name="Subtitle 2"/>
+          <p:cNvPr id="551928948" name="Subtitle 2"/>
           <p:cNvSpPr>
             <a:spLocks noGrp="1"/>
           </p:cNvSpPr>
@@ -5300,7 +5300,7 @@
       </p:grpSpPr>
       <p:sp>
         <p:nvSpPr>
-          <p:cNvPr id="941366923" name="Title 1"/>
+          <p:cNvPr id="389805631" name="Title 1"/>
           <p:cNvSpPr>
             <a:spLocks noGrp="1"/>
           </p:cNvSpPr>
@@ -5336,7 +5336,7 @@
       </p:sp>
       <p:sp>
         <p:nvSpPr>
-          <p:cNvPr id="855526098" name="Content Placeholder 2"/>
+          <p:cNvPr id="1088298278" name="Content Placeholder 2"/>
           <p:cNvSpPr>
             <a:spLocks noGrp="1"/>
           </p:cNvSpPr>
@@ -5608,7 +5608,7 @@
       </p:grpSpPr>
       <p:sp>
         <p:nvSpPr>
-          <p:cNvPr id="1266078357" name="Title 1"/>
+          <p:cNvPr id="309259895" name="Title 1"/>
           <p:cNvSpPr>
             <a:spLocks noGrp="1"/>
           </p:cNvSpPr>
@@ -5646,7 +5646,7 @@
       </p:sp>
       <p:sp>
         <p:nvSpPr>
-          <p:cNvPr id="883436515" name="Content Placeholder 2"/>
+          <p:cNvPr id="1372166170" name="Content Placeholder 2"/>
           <p:cNvSpPr>
             <a:spLocks noGrp="1"/>
           </p:cNvSpPr>
@@ -5759,9 +5759,9 @@
                 <a:solidFill>
                   <a:srgbClr val="000000"/>
                 </a:solidFill>
-                <a:latin typeface="Ariel"/>
-                <a:ea typeface="Ariel"/>
-                <a:cs typeface="Ariel"/>
+                <a:latin typeface="Arial"/>
+                <a:ea typeface="Arial"/>
+                <a:cs typeface="Arial"/>
               </a:rPr>
               <a:t>4Ag + 2H₂S + O₂ </a:t>
             </a:r>
@@ -5770,9 +5770,9 @@
                 <a:solidFill>
                   <a:srgbClr val="000000"/>
                 </a:solidFill>
-                <a:latin typeface="Ariel"/>
-                <a:ea typeface="Ariel"/>
-                <a:cs typeface="Ariel"/>
+                <a:latin typeface="Arial"/>
+                <a:ea typeface="Arial"/>
+                <a:cs typeface="Arial"/>
               </a:rPr>
               <a:t>→ 2Ag₂S + 2H₂O</a:t>
             </a:r>
@@ -5875,7 +5875,7 @@
       </p:grpSpPr>
       <p:sp>
         <p:nvSpPr>
-          <p:cNvPr id="1234679283" name="Title 1"/>
+          <p:cNvPr id="1434238811" name="Title 1"/>
           <p:cNvSpPr>
             <a:spLocks noGrp="1"/>
           </p:cNvSpPr>
@@ -5899,7 +5899,7 @@
       </p:sp>
       <p:sp>
         <p:nvSpPr>
-          <p:cNvPr id="1912272539" name="Content Placeholder 2"/>
+          <p:cNvPr id="508223220" name="Content Placeholder 2"/>
           <p:cNvSpPr>
             <a:spLocks noGrp="1"/>
           </p:cNvSpPr>
@@ -5953,9 +5953,9 @@
                 <a:solidFill>
                   <a:srgbClr val="000000"/>
                 </a:solidFill>
-                <a:latin typeface="Ariel"/>
-                <a:ea typeface="Ariel"/>
-                <a:cs typeface="Ariel"/>
+                <a:latin typeface="Arial"/>
+                <a:ea typeface="Arial"/>
+                <a:cs typeface="Arial"/>
               </a:rPr>
               <a:t>Сплошная</a:t>
             </a:r>
@@ -5964,11 +5964,55 @@
                 <a:solidFill>
                   <a:srgbClr val="000000"/>
                 </a:solidFill>
-                <a:latin typeface="Ariel"/>
-                <a:ea typeface="Ariel"/>
-                <a:cs typeface="Ariel"/>
-              </a:rPr>
-              <a:t> (равномерная) – ржавчина по всей поверхности</a:t>
+                <a:latin typeface="Arial"/>
+                <a:ea typeface="Arial"/>
+                <a:cs typeface="Arial"/>
+              </a:rPr>
+              <a:t> </a:t>
+            </a:r>
+            <a:r>
+              <a:rPr sz="2800" b="0" i="0" u="none">
+                <a:solidFill>
+                  <a:srgbClr val="000000"/>
+                </a:solidFill>
+                <a:latin typeface="Arial"/>
+                <a:ea typeface="Arial"/>
+                <a:cs typeface="Arial"/>
+              </a:rPr>
+              <a:t>(равномерная) – ржавчина по всей поверхности</a:t>
+            </a:r>
+            <a:endParaRPr sz="2800">
+              <a:latin typeface="Arial"/>
+              <a:cs typeface="Arial"/>
+            </a:endParaRPr>
+          </a:p>
+          <a:p>
+            <a:pPr marL="0" indent="0">
+              <a:buFont typeface="Arial"/>
+              <a:buNone/>
+              <a:defRPr/>
+            </a:pPr>
+            <a:r>
+              <a:rPr sz="2800" b="1" i="0" u="none">
+                <a:solidFill>
+                  <a:srgbClr val="000000"/>
+                </a:solidFill>
+                <a:latin typeface="Arial"/>
+                <a:ea typeface="Arial"/>
+                <a:cs typeface="Arial"/>
+              </a:rPr>
+              <a:t>Местная</a:t>
+            </a:r>
+            <a:r>
+              <a:rPr sz="2800" b="0" i="0" u="none">
+                <a:solidFill>
+                  <a:srgbClr val="000000"/>
+                </a:solidFill>
+                <a:latin typeface="Arial"/>
+                <a:ea typeface="Arial"/>
+                <a:cs typeface="Arial"/>
+              </a:rPr>
+              <a:t> (точечная, язвенная, межкристаллитная) – самая опасная, так как снижает прочность незаметно.</a:t>
             </a:r>
             <a:endParaRPr lang="ru-RU" sz="2800">
               <a:latin typeface="Ariel"/>
@@ -5987,54 +6031,20 @@
                 <a:solidFill>
                   <a:srgbClr val="000000"/>
                 </a:solidFill>
-                <a:latin typeface="Ariel"/>
-                <a:ea typeface="Ariel"/>
-                <a:cs typeface="Ariel"/>
-              </a:rPr>
-              <a:t>Местная</a:t>
+                <a:latin typeface="Arial"/>
+                <a:ea typeface="Arial"/>
+                <a:cs typeface="Arial"/>
+              </a:rPr>
+              <a:t>Контактная</a:t>
             </a:r>
             <a:r>
               <a:rPr sz="2800" b="0" i="0" u="none">
                 <a:solidFill>
                   <a:srgbClr val="000000"/>
                 </a:solidFill>
-                <a:latin typeface="Ariel"/>
-                <a:ea typeface="Ariel"/>
-                <a:cs typeface="Ariel"/>
-              </a:rPr>
-              <a:t> (точечная, язвенная, межкристаллитная) – самая опасная, так как снижает прочность незаметно.</a:t>
-            </a:r>
-            <a:endParaRPr lang="ru-RU" sz="2800">
-              <a:latin typeface="Ariel"/>
-              <a:ea typeface="Ariel"/>
-              <a:cs typeface="Ariel"/>
-            </a:endParaRPr>
-          </a:p>
-          <a:p>
-            <a:pPr marL="0" indent="0">
-              <a:buFont typeface="Arial"/>
-              <a:buNone/>
-              <a:defRPr/>
-            </a:pPr>
-            <a:r>
-              <a:rPr sz="2800" b="1" i="0" u="none">
-                <a:solidFill>
-                  <a:srgbClr val="000000"/>
-                </a:solidFill>
-                <a:latin typeface="Ariel"/>
-                <a:ea typeface="Ariel"/>
-                <a:cs typeface="Ariel"/>
-              </a:rPr>
-              <a:t>Контактная</a:t>
-            </a:r>
-            <a:r>
-              <a:rPr sz="2800" b="0" i="0" u="none">
-                <a:solidFill>
-                  <a:srgbClr val="000000"/>
-                </a:solidFill>
-                <a:latin typeface="Ariel"/>
-                <a:ea typeface="Ariel"/>
-                <a:cs typeface="Ariel"/>
+                <a:latin typeface="Arial"/>
+                <a:ea typeface="Arial"/>
+                <a:cs typeface="Arial"/>
               </a:rPr>
               <a:t> – между двумя разными металлами (например, железо и медь).</a:t>
             </a:r>
@@ -6044,7 +6054,7 @@
       </p:sp>
       <p:pic>
         <p:nvPicPr>
-          <p:cNvPr id="504355123" name=""/>
+          <p:cNvPr id="771802254" name=""/>
           <p:cNvPicPr>
             <a:picLocks noChangeAspect="1"/>
           </p:cNvPicPr>
@@ -6066,7 +6076,7 @@
       </p:pic>
       <p:pic>
         <p:nvPicPr>
-          <p:cNvPr id="578269824" name=""/>
+          <p:cNvPr id="1885719775" name=""/>
           <p:cNvPicPr>
             <a:picLocks noChangeAspect="1"/>
           </p:cNvPicPr>
@@ -6088,7 +6098,7 @@
       </p:pic>
       <p:pic>
         <p:nvPicPr>
-          <p:cNvPr id="1741583864" name=""/>
+          <p:cNvPr id="748229515" name=""/>
           <p:cNvPicPr>
             <a:picLocks noChangeAspect="1"/>
           </p:cNvPicPr>
@@ -6144,7 +6154,7 @@
       </p:grpSpPr>
       <p:sp>
         <p:nvSpPr>
-          <p:cNvPr id="2056159999" name="Title 1"/>
+          <p:cNvPr id="1450710250" name="Title 1"/>
           <p:cNvSpPr>
             <a:spLocks noGrp="1"/>
           </p:cNvSpPr>
@@ -6173,7 +6183,7 @@
       </p:sp>
       <p:sp>
         <p:nvSpPr>
-          <p:cNvPr id="457255515" name="Content Placeholder 2"/>
+          <p:cNvPr id="1901735612" name="Content Placeholder 2"/>
           <p:cNvSpPr>
             <a:spLocks noGrp="1"/>
           </p:cNvSpPr>
@@ -6314,9 +6324,9 @@
                 <a:solidFill>
                   <a:srgbClr val="000000"/>
                 </a:solidFill>
-                <a:latin typeface="Ariel"/>
-                <a:ea typeface="Ariel"/>
-                <a:cs typeface="Ariel"/>
+                <a:latin typeface="Arial"/>
+                <a:ea typeface="Arial"/>
+                <a:cs typeface="Arial"/>
               </a:rPr>
               <a:t>Стадия 1 – Электрохимическая (работа гальванопары)</a:t>
             </a:r>
@@ -6325,9 +6335,9 @@
                 <a:solidFill>
                   <a:srgbClr val="000000"/>
                 </a:solidFill>
-                <a:latin typeface="Ariel"/>
-                <a:ea typeface="Ariel"/>
-                <a:cs typeface="Ariel"/>
+                <a:latin typeface="Arial"/>
+                <a:ea typeface="Arial"/>
+                <a:cs typeface="Arial"/>
               </a:rPr>
             </a:br>
             <a:r>
@@ -6335,15 +6345,15 @@
                 <a:solidFill>
                   <a:srgbClr val="000000"/>
                 </a:solidFill>
-                <a:latin typeface="Ariel"/>
-                <a:ea typeface="Ariel"/>
-                <a:cs typeface="Ariel"/>
+                <a:latin typeface="Arial"/>
+                <a:ea typeface="Arial"/>
+                <a:cs typeface="Arial"/>
               </a:rPr>
               <a:t>Одновременно идут два процесса:</a:t>
             </a:r>
             <a:endParaRPr sz="2800">
-              <a:latin typeface="Ariel"/>
-              <a:cs typeface="Ariel"/>
+              <a:latin typeface="Arial"/>
+              <a:cs typeface="Arial"/>
             </a:endParaRPr>
           </a:p>
           <a:p>
@@ -6355,9 +6365,9 @@
                 <a:solidFill>
                   <a:srgbClr val="000000"/>
                 </a:solidFill>
-                <a:latin typeface="Ariel"/>
-                <a:ea typeface="Ariel"/>
-                <a:cs typeface="Ariel"/>
+                <a:latin typeface="Arial"/>
+                <a:ea typeface="Arial"/>
+                <a:cs typeface="Arial"/>
               </a:rPr>
               <a:t>На аноде: </a:t>
             </a:r>
@@ -6366,15 +6376,15 @@
                 <a:solidFill>
                   <a:srgbClr val="000000"/>
                 </a:solidFill>
-                <a:latin typeface="Ariel"/>
-                <a:ea typeface="Ariel"/>
-                <a:cs typeface="Ariel"/>
+                <a:latin typeface="Arial"/>
+                <a:ea typeface="Arial"/>
+                <a:cs typeface="Arial"/>
               </a:rPr>
               <a:t>Fe⁰ – 2e⁻ → Fe²⁺</a:t>
             </a:r>
             <a:endParaRPr sz="2800">
-              <a:latin typeface="Ariel"/>
-              <a:cs typeface="Ariel"/>
+              <a:latin typeface="Arial"/>
+              <a:cs typeface="Arial"/>
             </a:endParaRPr>
           </a:p>
           <a:p>
@@ -6386,9 +6396,9 @@
                 <a:solidFill>
                   <a:srgbClr val="000000"/>
                 </a:solidFill>
-                <a:latin typeface="Ariel"/>
-                <a:ea typeface="Ariel"/>
-                <a:cs typeface="Ariel"/>
+                <a:latin typeface="Arial"/>
+                <a:ea typeface="Arial"/>
+                <a:cs typeface="Arial"/>
               </a:rPr>
               <a:t>На катоде: </a:t>
             </a:r>
@@ -6397,15 +6407,15 @@
                 <a:solidFill>
                   <a:srgbClr val="000000"/>
                 </a:solidFill>
-                <a:latin typeface="Ariel"/>
-                <a:ea typeface="Ariel"/>
-                <a:cs typeface="Ariel"/>
+                <a:latin typeface="Arial"/>
+                <a:ea typeface="Arial"/>
+                <a:cs typeface="Arial"/>
               </a:rPr>
               <a:t>O₂ + 2H₂O + 4e⁻ → 4OH⁻</a:t>
             </a:r>
             <a:endParaRPr sz="2800">
-              <a:latin typeface="Ariel"/>
-              <a:cs typeface="Ariel"/>
+              <a:latin typeface="Arial"/>
+              <a:cs typeface="Arial"/>
             </a:endParaRPr>
           </a:p>
           <a:p>
@@ -6419,9 +6429,9 @@
                 <a:solidFill>
                   <a:srgbClr val="000000"/>
                 </a:solidFill>
-                <a:latin typeface="Ariel"/>
-                <a:ea typeface="Ariel"/>
-                <a:cs typeface="Ariel"/>
+                <a:latin typeface="Arial"/>
+                <a:ea typeface="Arial"/>
+                <a:cs typeface="Arial"/>
               </a:rPr>
               <a:t>О</a:t>
             </a:r>
@@ -6430,9 +6440,9 @@
                 <a:solidFill>
                   <a:srgbClr val="000000"/>
                 </a:solidFill>
-                <a:latin typeface="Ariel"/>
-                <a:ea typeface="Ariel"/>
-                <a:cs typeface="Ariel"/>
+                <a:latin typeface="Arial"/>
+                <a:ea typeface="Arial"/>
+                <a:cs typeface="Arial"/>
               </a:rPr>
               <a:t>бразование ионов Fe²⁺ и OH⁻.</a:t>
             </a:r>
@@ -6493,7 +6503,7 @@
       </p:grpSpPr>
       <p:sp>
         <p:nvSpPr>
-          <p:cNvPr id="605964312" name="Title 1"/>
+          <p:cNvPr id="378165244" name="Title 1"/>
           <p:cNvSpPr>
             <a:spLocks noGrp="1"/>
           </p:cNvSpPr>
@@ -6522,7 +6532,7 @@
       </p:sp>
       <p:sp>
         <p:nvSpPr>
-          <p:cNvPr id="1909460751" name="Content Placeholder 2"/>
+          <p:cNvPr id="470855152" name="Content Placeholder 2"/>
           <p:cNvSpPr>
             <a:spLocks noGrp="1"/>
           </p:cNvSpPr>
@@ -6552,9 +6562,9 @@
                 <a:solidFill>
                   <a:srgbClr val="000000"/>
                 </a:solidFill>
-                <a:latin typeface="Ariel"/>
-                <a:ea typeface="Ariel"/>
-                <a:cs typeface="Ariel"/>
+                <a:latin typeface="Arial"/>
+                <a:ea typeface="Arial"/>
+                <a:cs typeface="Arial"/>
               </a:rPr>
               <a:t>Стадия 2 – Химическая (образование осадка)</a:t>
             </a:r>
@@ -6563,9 +6573,9 @@
                 <a:solidFill>
                   <a:srgbClr val="000000"/>
                 </a:solidFill>
-                <a:latin typeface="Ariel"/>
-                <a:ea typeface="Ariel"/>
-                <a:cs typeface="Ariel"/>
+                <a:latin typeface="Arial"/>
+                <a:ea typeface="Arial"/>
+                <a:cs typeface="Arial"/>
               </a:rPr>
             </a:br>
             <a:r>
@@ -6573,9 +6583,9 @@
                 <a:solidFill>
                   <a:srgbClr val="000000"/>
                 </a:solidFill>
-                <a:latin typeface="Ariel"/>
-                <a:ea typeface="Ariel"/>
-                <a:cs typeface="Ariel"/>
+                <a:latin typeface="Arial"/>
+                <a:ea typeface="Arial"/>
+                <a:cs typeface="Arial"/>
               </a:rPr>
               <a:t>Встречаясь в растворе, ионы реагируют:</a:t>
             </a:r>
@@ -6584,9 +6594,9 @@
                 <a:solidFill>
                   <a:srgbClr val="000000"/>
                 </a:solidFill>
-                <a:latin typeface="Ariel"/>
-                <a:ea typeface="Ariel"/>
-                <a:cs typeface="Ariel"/>
+                <a:latin typeface="Arial"/>
+                <a:ea typeface="Arial"/>
+                <a:cs typeface="Arial"/>
               </a:rPr>
             </a:br>
             <a:r>
@@ -6594,16 +6604,15 @@
                 <a:solidFill>
                   <a:srgbClr val="000000"/>
                 </a:solidFill>
-                <a:latin typeface="Ariel"/>
-                <a:ea typeface="Ariel"/>
-                <a:cs typeface="Ariel"/>
+                <a:latin typeface="Arial"/>
+                <a:ea typeface="Arial"/>
+                <a:cs typeface="Arial"/>
               </a:rPr>
               <a:t>Fe²⁺ + 2OH⁻ → Fe(OH)₂↓</a:t>
             </a:r>
             <a:endParaRPr sz="2500">
-              <a:latin typeface="Ariel"/>
-              <a:ea typeface="Ariel"/>
-              <a:cs typeface="Ariel"/>
+              <a:latin typeface="Arial"/>
+              <a:cs typeface="Arial"/>
             </a:endParaRPr>
           </a:p>
           <a:p>
@@ -6617,14 +6626,18 @@
                 <a:solidFill>
                   <a:srgbClr val="000000"/>
                 </a:solidFill>
-                <a:latin typeface="Ariel"/>
-                <a:ea typeface="Ariel"/>
-                <a:cs typeface="Ariel"/>
+                <a:latin typeface="Arial"/>
+                <a:ea typeface="Arial"/>
+                <a:cs typeface="Arial"/>
               </a:rPr>
               <a:t>Fe(OH)₂</a:t>
             </a:r>
             <a:r>
-              <a:rPr lang="ru-RU"/>
+              <a:rPr lang="ru-RU">
+                <a:latin typeface="Arial"/>
+                <a:ea typeface="Arial"/>
+                <a:cs typeface="Arial"/>
+              </a:rPr>
               <a:t> —</a:t>
             </a:r>
             <a:r>
@@ -6632,6 +6645,9 @@
                 <a:solidFill>
                   <a:schemeClr val="tx1"/>
                 </a:solidFill>
+                <a:latin typeface="Arial"/>
+                <a:ea typeface="Arial"/>
+                <a:cs typeface="Arial"/>
               </a:rPr>
               <a:t> белый осадок гидроксида железа</a:t>
             </a:r>
@@ -6640,10 +6656,16 @@
                 <a:solidFill>
                   <a:schemeClr val="tx1"/>
                 </a:solidFill>
+                <a:latin typeface="Arial"/>
+                <a:ea typeface="Arial"/>
+                <a:cs typeface="Arial"/>
               </a:rPr>
               <a:t>(II)</a:t>
             </a:r>
-            <a:endParaRPr/>
+            <a:endParaRPr>
+              <a:latin typeface="Arial"/>
+              <a:cs typeface="Arial"/>
+            </a:endParaRPr>
           </a:p>
           <a:p>
             <a:pPr marL="0" indent="0">
@@ -6651,7 +6673,10 @@
               <a:buNone/>
               <a:defRPr/>
             </a:pPr>
-            <a:endParaRPr/>
+            <a:endParaRPr>
+              <a:latin typeface="Arial"/>
+              <a:cs typeface="Arial"/>
+            </a:endParaRPr>
           </a:p>
           <a:p>
             <a:pPr marL="0" indent="0">
@@ -6712,9 +6737,8 @@
               </a:rPr>
               <a:t>4Fe(OH)₂ + O₂ + 2H₂O → 4Fe(OH)₃</a:t>
             </a:r>
-            <a:endParaRPr lang="en-US" sz="2800">
+            <a:endParaRPr sz="2800">
               <a:latin typeface="Arial"/>
-              <a:ea typeface="Arial"/>
               <a:cs typeface="Arial"/>
             </a:endParaRPr>
           </a:p>
@@ -6737,9 +6761,9 @@
                 <a:solidFill>
                   <a:schemeClr val="tx1"/>
                 </a:solidFill>
-                <a:latin typeface="+mn-lt"/>
-                <a:ea typeface="+mn-ea"/>
-                <a:cs typeface="+mn-cs"/>
+                <a:latin typeface="Arial"/>
+                <a:ea typeface="Arial"/>
+                <a:cs typeface="Arial"/>
               </a:rPr>
               <a:t>елый осадок гидроксида железа</a:t>
             </a:r>
@@ -6748,9 +6772,9 @@
                 <a:solidFill>
                   <a:schemeClr val="tx1"/>
                 </a:solidFill>
-                <a:latin typeface="+mn-lt"/>
-                <a:ea typeface="+mn-ea"/>
-                <a:cs typeface="+mn-cs"/>
+                <a:latin typeface="Arial"/>
+                <a:ea typeface="Arial"/>
+                <a:cs typeface="Arial"/>
               </a:rPr>
               <a:t>(II)</a:t>
             </a:r>
@@ -6765,9 +6789,8 @@
               </a:rPr>
               <a:t> превращается в бурый</a:t>
             </a:r>
-            <a:endParaRPr lang="en-US" sz="2800">
+            <a:endParaRPr sz="2800">
               <a:latin typeface="Arial"/>
-              <a:ea typeface="Arial"/>
               <a:cs typeface="Arial"/>
             </a:endParaRPr>
           </a:p>
@@ -6777,10 +6800,12 @@
               <a:buNone/>
               <a:defRPr/>
             </a:pPr>
-            <a:endParaRPr lang="en-US">
+            <a:endParaRPr>
               <a:solidFill>
                 <a:schemeClr val="tx1"/>
               </a:solidFill>
+              <a:latin typeface="Arial"/>
+              <a:cs typeface="Arial"/>
             </a:endParaRPr>
           </a:p>
           <a:p>
@@ -6889,7 +6914,7 @@
       </p:grpSpPr>
       <p:sp>
         <p:nvSpPr>
-          <p:cNvPr id="88024528" name="Title 1"/>
+          <p:cNvPr id="45731763" name="Title 1"/>
           <p:cNvSpPr>
             <a:spLocks noGrp="1"/>
           </p:cNvSpPr>
@@ -6927,7 +6952,7 @@
       </p:sp>
       <p:sp>
         <p:nvSpPr>
-          <p:cNvPr id="333774035" name="Content Placeholder 2"/>
+          <p:cNvPr id="227713200" name="Content Placeholder 2"/>
           <p:cNvSpPr>
             <a:spLocks noGrp="1"/>
           </p:cNvSpPr>
@@ -6957,15 +6982,15 @@
                 <a:solidFill>
                   <a:srgbClr val="000000"/>
                 </a:solidFill>
-                <a:latin typeface=" Arial"/>
-                <a:ea typeface=" Arial"/>
-                <a:cs typeface=" Arial"/>
+                <a:latin typeface="Arial"/>
+                <a:ea typeface="Arial"/>
+                <a:cs typeface="Arial"/>
               </a:rPr>
               <a:t>1. Изменение состава металла – легирование</a:t>
             </a:r>
             <a:endParaRPr sz="2800">
-              <a:latin typeface=" Arial"/>
-              <a:cs typeface=" Arial"/>
+              <a:latin typeface="Arial"/>
+              <a:cs typeface="Arial"/>
             </a:endParaRPr>
           </a:p>
           <a:p>
@@ -6979,91 +7004,88 @@
                 <a:solidFill>
                   <a:srgbClr val="000000"/>
                 </a:solidFill>
-                <a:latin typeface=" Arial"/>
-                <a:ea typeface=" Arial"/>
-                <a:cs typeface=" Arial"/>
+                <a:latin typeface="Arial"/>
+                <a:ea typeface="Arial"/>
+                <a:cs typeface="Arial"/>
               </a:rPr>
               <a:t>Добавление  хрома, никеля даёт нержавеющую сталь. Хром образует на поверхности  плотную оксидную плёнку Cr₂O₃, которая не даёт окисляться железу.</a:t>
-            </a:r>
-            <a:endParaRPr sz="2800" b="0" i="0" u="none">
-              <a:solidFill>
-                <a:srgbClr val="000000"/>
-              </a:solidFill>
-              <a:latin typeface=" Arial"/>
-              <a:ea typeface=" Arial"/>
-              <a:cs typeface=" Arial"/>
-            </a:endParaRPr>
-          </a:p>
-          <a:p>
-            <a:pPr marL="0" indent="0">
-              <a:buFont typeface="Arial"/>
-              <a:buNone/>
-              <a:defRPr/>
-            </a:pPr>
-            <a:r>
-              <a:rPr sz="2800" b="1" i="0" u="none">
-                <a:solidFill>
-                  <a:srgbClr val="000000"/>
-                </a:solidFill>
-                <a:latin typeface="Arial"/>
-                <a:ea typeface="Arial"/>
-                <a:cs typeface="Arial"/>
-              </a:rPr>
-              <a:t>2. Защитные покрытия</a:t>
             </a:r>
             <a:endParaRPr sz="2800" b="0" i="0" u="none">
               <a:solidFill>
                 <a:srgbClr val="000000"/>
               </a:solidFill>
               <a:latin typeface="Arial"/>
-              <a:ea typeface="Arial"/>
               <a:cs typeface="Arial"/>
             </a:endParaRPr>
           </a:p>
           <a:p>
-            <a:pPr>
-              <a:defRPr/>
-            </a:pPr>
-            <a:r>
-              <a:rPr sz="2800" b="0" i="0" u="none">
-                <a:solidFill>
-                  <a:srgbClr val="000000"/>
-                </a:solidFill>
-                <a:latin typeface="Ariel"/>
-                <a:ea typeface="Ariel"/>
-                <a:cs typeface="Ariel"/>
-              </a:rPr>
-              <a:t>Неметаллические</a:t>
-            </a:r>
+            <a:pPr marL="0" indent="0">
+              <a:buFont typeface="Arial"/>
+              <a:buNone/>
+              <a:defRPr/>
+            </a:pPr>
             <a:r>
               <a:rPr sz="2800" b="1" i="0" u="none">
                 <a:solidFill>
                   <a:srgbClr val="000000"/>
                 </a:solidFill>
-                <a:latin typeface="Ariel"/>
-                <a:ea typeface="Ariel"/>
-                <a:cs typeface="Ariel"/>
-              </a:rPr>
-              <a:t>:</a:t>
-            </a:r>
-            <a:r>
-              <a:rPr sz="2800" b="0" i="0" u="none">
-                <a:solidFill>
-                  <a:srgbClr val="000000"/>
-                </a:solidFill>
-                <a:latin typeface="Ariel"/>
-                <a:ea typeface="Ariel"/>
-                <a:cs typeface="Ariel"/>
-              </a:rPr>
-              <a:t> </a:t>
+                <a:latin typeface="Arial"/>
+                <a:ea typeface="Arial"/>
+                <a:cs typeface="Arial"/>
+              </a:rPr>
+              <a:t>2. Защитные покрытия</a:t>
             </a:r>
             <a:endParaRPr sz="2800" b="0" i="0" u="none">
               <a:solidFill>
                 <a:srgbClr val="000000"/>
               </a:solidFill>
-              <a:latin typeface="Ariel"/>
-              <a:ea typeface="Ariel"/>
-              <a:cs typeface="Ariel"/>
+              <a:latin typeface="Arial"/>
+              <a:cs typeface="Arial"/>
+            </a:endParaRPr>
+          </a:p>
+          <a:p>
+            <a:pPr>
+              <a:defRPr/>
+            </a:pPr>
+            <a:r>
+              <a:rPr sz="2800" b="0" i="0" u="none">
+                <a:solidFill>
+                  <a:srgbClr val="000000"/>
+                </a:solidFill>
+                <a:latin typeface="Arial"/>
+                <a:ea typeface="Arial"/>
+                <a:cs typeface="Arial"/>
+              </a:rPr>
+              <a:t>Неметаллические</a:t>
+            </a:r>
+            <a:r>
+              <a:rPr sz="2800" b="1" i="0" u="none">
+                <a:solidFill>
+                  <a:srgbClr val="000000"/>
+                </a:solidFill>
+                <a:latin typeface="Arial"/>
+                <a:ea typeface="Arial"/>
+                <a:cs typeface="Arial"/>
+              </a:rPr>
+              <a:t>:</a:t>
+            </a:r>
+            <a:r>
+              <a:rPr sz="2800" b="0" i="0" u="none">
+                <a:solidFill>
+                  <a:srgbClr val="000000"/>
+                </a:solidFill>
+                <a:latin typeface="Arial"/>
+                <a:ea typeface="Arial"/>
+                <a:cs typeface="Arial"/>
+              </a:rPr>
+              <a:t> </a:t>
+            </a:r>
+            <a:endParaRPr sz="2800" b="0" i="0" u="none">
+              <a:solidFill>
+                <a:srgbClr val="000000"/>
+              </a:solidFill>
+              <a:latin typeface="Arial"/>
+              <a:cs typeface="Arial"/>
             </a:endParaRPr>
           </a:p>
           <a:p>
@@ -7077,9 +7099,9 @@
                 <a:solidFill>
                   <a:srgbClr val="000000"/>
                 </a:solidFill>
-                <a:latin typeface="Ariel"/>
-                <a:ea typeface="Ariel"/>
-                <a:cs typeface="Ariel"/>
+                <a:latin typeface="Arial"/>
+                <a:ea typeface="Arial"/>
+                <a:cs typeface="Arial"/>
               </a:rPr>
               <a:t>Л</a:t>
             </a:r>
@@ -7088,94 +7110,11 @@
                 <a:solidFill>
                   <a:srgbClr val="000000"/>
                 </a:solidFill>
-                <a:latin typeface="Ariel"/>
-                <a:ea typeface="Ariel"/>
-                <a:cs typeface="Ariel"/>
+                <a:latin typeface="Arial"/>
+                <a:ea typeface="Arial"/>
+                <a:cs typeface="Arial"/>
               </a:rPr>
               <a:t>аки, краски, эмали, смазки. Изолируют металл от O₂ и H₂O.</a:t>
-            </a:r>
-            <a:endParaRPr sz="2800">
-              <a:latin typeface="Ariel"/>
-              <a:cs typeface="Ariel"/>
-            </a:endParaRPr>
-          </a:p>
-          <a:p>
-            <a:pPr>
-              <a:defRPr/>
-            </a:pPr>
-            <a:r>
-              <a:rPr sz="2800" b="0" i="0" u="none">
-                <a:solidFill>
-                  <a:srgbClr val="000000"/>
-                </a:solidFill>
-                <a:latin typeface="Ariel"/>
-                <a:ea typeface="Ariel"/>
-                <a:cs typeface="Ariel"/>
-              </a:rPr>
-              <a:t>Металлические покрытия</a:t>
-            </a:r>
-            <a:r>
-              <a:rPr sz="2800" b="1" i="0" u="none">
-                <a:solidFill>
-                  <a:srgbClr val="000000"/>
-                </a:solidFill>
-                <a:latin typeface="Ariel"/>
-                <a:ea typeface="Ariel"/>
-                <a:cs typeface="Ariel"/>
-              </a:rPr>
-              <a:t>:</a:t>
-            </a:r>
-            <a:endParaRPr sz="2800">
-              <a:latin typeface="Ariel"/>
-              <a:cs typeface="Ariel"/>
-            </a:endParaRPr>
-          </a:p>
-          <a:p>
-            <a:pPr marL="0" indent="0">
-              <a:buFont typeface="Arial"/>
-              <a:buNone/>
-              <a:defRPr/>
-            </a:pPr>
-            <a:r>
-              <a:rPr sz="2800" b="0" i="1" u="none">
-                <a:solidFill>
-                  <a:srgbClr val="000000"/>
-                </a:solidFill>
-                <a:latin typeface="Ariel"/>
-                <a:ea typeface="Ariel"/>
-                <a:cs typeface="Ariel"/>
-              </a:rPr>
-              <a:t>Катодное покрытие</a:t>
-            </a:r>
-            <a:r>
-              <a:rPr sz="2800" b="0" i="0" u="none">
-                <a:solidFill>
-                  <a:srgbClr val="000000"/>
-                </a:solidFill>
-                <a:latin typeface="Ariel"/>
-                <a:ea typeface="Ariel"/>
-                <a:cs typeface="Ariel"/>
-              </a:rPr>
-              <a:t> (покрывающий металл менее активен).</a:t>
-            </a:r>
-            <a:r>
-              <a:rPr sz="2800">
-                <a:latin typeface="Arial"/>
-                <a:ea typeface="Arial"/>
-                <a:cs typeface="Arial"/>
-              </a:rPr>
-              <a:t> </a:t>
-            </a:r>
-            <a:r>
-              <a:rPr sz="2800" b="0" i="0" u="none">
-                <a:solidFill>
-                  <a:srgbClr val="000000"/>
-                </a:solidFill>
-                <a:latin typeface="Arial"/>
-                <a:ea typeface="Arial"/>
-                <a:cs typeface="Arial"/>
-              </a:rPr>
-              <a:t> Например, лужёное железо (покрытие Sn)</a:t>
             </a:r>
             <a:endParaRPr sz="2800">
               <a:latin typeface="Arial"/>
@@ -7183,6 +7122,37 @@
             </a:endParaRPr>
           </a:p>
           <a:p>
+            <a:pPr>
+              <a:defRPr/>
+            </a:pPr>
+            <a:r>
+              <a:rPr sz="2800" b="0" i="0" u="none">
+                <a:solidFill>
+                  <a:srgbClr val="000000"/>
+                </a:solidFill>
+                <a:latin typeface="Arial"/>
+                <a:ea typeface="Arial"/>
+                <a:cs typeface="Arial"/>
+              </a:rPr>
+              <a:t>Металлические покрытия</a:t>
+            </a:r>
+            <a:r>
+              <a:rPr sz="2800" b="1" i="0" u="none">
+                <a:solidFill>
+                  <a:srgbClr val="000000"/>
+                </a:solidFill>
+                <a:latin typeface="Arial"/>
+                <a:ea typeface="Arial"/>
+                <a:cs typeface="Arial"/>
+              </a:rPr>
+              <a:t>:</a:t>
+            </a:r>
+            <a:endParaRPr sz="2800">
+              <a:latin typeface="Arial"/>
+              <a:cs typeface="Arial"/>
+            </a:endParaRPr>
+          </a:p>
+          <a:p>
             <a:pPr marL="0" indent="0">
               <a:buFont typeface="Arial"/>
               <a:buNone/>
@@ -7197,6 +7167,58 @@
                 <a:ea typeface="Arial"/>
                 <a:cs typeface="Arial"/>
               </a:rPr>
+              <a:t>Катодное покрытие</a:t>
+            </a:r>
+            <a:r>
+              <a:rPr sz="2800" b="0" i="0" u="none">
+                <a:solidFill>
+                  <a:srgbClr val="000000"/>
+                </a:solidFill>
+                <a:latin typeface="Arial"/>
+                <a:ea typeface="Arial"/>
+                <a:cs typeface="Arial"/>
+              </a:rPr>
+              <a:t> (покрывающий металл менее активен).</a:t>
+            </a:r>
+            <a:r>
+              <a:rPr sz="2800">
+                <a:latin typeface="Arial"/>
+                <a:ea typeface="Arial"/>
+                <a:cs typeface="Arial"/>
+              </a:rPr>
+              <a:t> </a:t>
+            </a:r>
+            <a:r>
+              <a:rPr sz="2800" b="0" i="0" u="none">
+                <a:solidFill>
+                  <a:srgbClr val="000000"/>
+                </a:solidFill>
+                <a:latin typeface="Arial"/>
+                <a:ea typeface="Arial"/>
+                <a:cs typeface="Arial"/>
+              </a:rPr>
+              <a:t> Например, лужёное железо (покрытие Sn)</a:t>
+            </a:r>
+            <a:endParaRPr sz="2800">
+              <a:latin typeface="Arial"/>
+              <a:cs typeface="Arial"/>
+            </a:endParaRPr>
+          </a:p>
+          <a:p>
+            <a:pPr marL="0" indent="0">
+              <a:buFont typeface="Arial"/>
+              <a:buNone/>
+              <a:defRPr/>
+            </a:pPr>
+            <a:r>
+              <a:rPr sz="2800" b="0" i="1" u="none">
+                <a:solidFill>
+                  <a:srgbClr val="000000"/>
+                </a:solidFill>
+                <a:latin typeface="Arial"/>
+                <a:ea typeface="Arial"/>
+                <a:cs typeface="Arial"/>
+              </a:rPr>
               <a:t>Анодное покрытие</a:t>
             </a:r>
             <a:r>
@@ -7215,9 +7237,9 @@
                 <a:solidFill>
                   <a:srgbClr val="000000"/>
                 </a:solidFill>
-                <a:latin typeface="Ariel"/>
-                <a:ea typeface="Ariel"/>
-                <a:cs typeface="Ariel"/>
+                <a:latin typeface="Arial"/>
+                <a:ea typeface="Arial"/>
+                <a:cs typeface="Arial"/>
               </a:rPr>
               <a:t>активен). Например, оцинковка (покрытие Zn)</a:t>
             </a:r>
@@ -7260,7 +7282,7 @@
       </p:grpSpPr>
       <p:sp>
         <p:nvSpPr>
-          <p:cNvPr id="962661583" name="Title 1"/>
+          <p:cNvPr id="1485539603" name="Title 1"/>
           <p:cNvSpPr>
             <a:spLocks noGrp="1"/>
           </p:cNvSpPr>
@@ -7294,7 +7316,7 @@
       </p:sp>
       <p:sp>
         <p:nvSpPr>
-          <p:cNvPr id="374895368" name="Content Placeholder 2"/>
+          <p:cNvPr id="2021534544" name="Content Placeholder 2"/>
           <p:cNvSpPr>
             <a:spLocks noGrp="1"/>
           </p:cNvSpPr>
@@ -7317,6 +7339,9 @@
                 <a:solidFill>
                   <a:schemeClr val="tx1"/>
                 </a:solidFill>
+                <a:latin typeface="Arial"/>
+                <a:ea typeface="Arial"/>
+                <a:cs typeface="Arial"/>
               </a:rPr>
               <a:t>Источники информации</a:t>
             </a:r>
@@ -7325,10 +7350,16 @@
                 <a:solidFill>
                   <a:schemeClr val="tx1"/>
                 </a:solidFill>
+                <a:latin typeface="Arial"/>
+                <a:ea typeface="Arial"/>
+                <a:cs typeface="Arial"/>
               </a:rPr>
               <a:t>:</a:t>
             </a:r>
-            <a:endParaRPr lang="en-US"/>
+            <a:endParaRPr>
+              <a:latin typeface="Arial"/>
+              <a:cs typeface="Arial"/>
+            </a:endParaRPr>
           </a:p>
           <a:p>
             <a:pPr>
@@ -7339,15 +7370,15 @@
                 <a:solidFill>
                   <a:srgbClr val="000000"/>
                 </a:solidFill>
-                <a:latin typeface="Ariel"/>
-                <a:ea typeface="Ariel"/>
-                <a:cs typeface="Ariel"/>
+                <a:latin typeface="Arial"/>
+                <a:ea typeface="Arial"/>
+                <a:cs typeface="Arial"/>
               </a:rPr>
               <a:t>Габриелян О.С. Химия. 9 класс: учеб. для общеобразоват. учреждений. – М.: Дрофа</a:t>
             </a:r>
             <a:endParaRPr sz="2800">
-              <a:latin typeface="Ariel"/>
-              <a:cs typeface="Ariel"/>
+              <a:latin typeface="Arial"/>
+              <a:cs typeface="Arial"/>
             </a:endParaRPr>
           </a:p>
           <a:p>
@@ -7359,9 +7390,9 @@
                 <a:solidFill>
                   <a:srgbClr val="000000"/>
                 </a:solidFill>
-                <a:latin typeface="Ariel"/>
-                <a:ea typeface="Ariel"/>
-                <a:cs typeface="Ariel"/>
+                <a:latin typeface="Arial"/>
+                <a:ea typeface="Arial"/>
+                <a:cs typeface="Arial"/>
               </a:rPr>
               <a:t>Сайт “</a:t>
             </a:r>
@@ -7370,9 +7401,9 @@
                 <a:solidFill>
                   <a:srgbClr val="000000"/>
                 </a:solidFill>
-                <a:latin typeface="Ariel"/>
-                <a:ea typeface="Ariel"/>
-                <a:cs typeface="Ariel"/>
+                <a:latin typeface="Arial"/>
+                <a:ea typeface="Arial"/>
+                <a:cs typeface="Arial"/>
               </a:rPr>
               <a:t>Наука</a:t>
             </a:r>
@@ -7381,9 +7412,9 @@
                 <a:solidFill>
                   <a:srgbClr val="000000"/>
                 </a:solidFill>
-                <a:latin typeface="Ariel"/>
-                <a:ea typeface="Ariel"/>
-                <a:cs typeface="Ariel"/>
+                <a:latin typeface="Arial"/>
+                <a:ea typeface="Arial"/>
+                <a:cs typeface="Arial"/>
               </a:rPr>
               <a:t> и жизнь” – статья “Коррозия</a:t>
             </a:r>
@@ -7392,9 +7423,9 @@
                 <a:solidFill>
                   <a:srgbClr val="000000"/>
                 </a:solidFill>
-                <a:latin typeface="Ariel"/>
-                <a:ea typeface="Ariel"/>
-                <a:cs typeface="Ariel"/>
+                <a:latin typeface="Arial"/>
+                <a:ea typeface="Arial"/>
+                <a:cs typeface="Arial"/>
               </a:rPr>
               <a:t> или жизнь</a:t>
             </a:r>
@@ -7403,9 +7434,9 @@
                 <a:solidFill>
                   <a:srgbClr val="000000"/>
                 </a:solidFill>
-                <a:latin typeface="Ariel"/>
-                <a:ea typeface="Ariel"/>
-                <a:cs typeface="Ariel"/>
+                <a:latin typeface="Arial"/>
+                <a:ea typeface="Arial"/>
+                <a:cs typeface="Arial"/>
               </a:rPr>
               <a:t>?” (</a:t>
             </a:r>
@@ -7414,9 +7445,9 @@
                 <a:solidFill>
                   <a:srgbClr val="000000"/>
                 </a:solidFill>
-                <a:latin typeface="Ariel"/>
-                <a:ea typeface="Ariel"/>
-                <a:cs typeface="Ariel"/>
+                <a:latin typeface="Arial"/>
+                <a:ea typeface="Arial"/>
+                <a:cs typeface="Arial"/>
                 <a:hlinkClick r:id="rId3" tooltip=""/>
               </a:rPr>
               <a:t>https://hij.ru/</a:t>
@@ -7426,9 +7457,9 @@
                 <a:solidFill>
                   <a:srgbClr val="000000"/>
                 </a:solidFill>
-                <a:latin typeface="Ariel"/>
-                <a:ea typeface="Ariel"/>
-                <a:cs typeface="Ariel"/>
+                <a:latin typeface="Arial"/>
+                <a:ea typeface="Arial"/>
+                <a:cs typeface="Arial"/>
               </a:rPr>
               <a:t>).</a:t>
             </a:r>
@@ -7438,7 +7469,7 @@
       </p:sp>
       <p:pic>
         <p:nvPicPr>
-          <p:cNvPr id="1070055669" name=""/>
+          <p:cNvPr id="1494296375" name=""/>
           <p:cNvPicPr>
             <a:picLocks noChangeAspect="1"/>
           </p:cNvPicPr>
@@ -7451,7 +7482,7 @@
         <p:spPr bwMode="auto">
           <a:xfrm flipH="0" flipV="0">
             <a:off x="9717591" y="4329545"/>
-            <a:ext cx="2543680" cy="2526722"/>
+            <a:ext cx="2543680" cy="2526721"/>
           </a:xfrm>
           <a:prstGeom prst="rect">
             <a:avLst/>
